--- a/projects/daosheng/docs/daosheng-nlzx-v2.budget-appendix-3nodes.pptx
+++ b/projects/daosheng/docs/daosheng-nlzx-v2.budget-appendix-3nodes.pptx
@@ -3191,7 +3191,7 @@
                           <a:cs typeface="Microsoft YaHei"/>
                           <a:sym typeface="Microsoft YaHei"/>
                         </a:rPr>
-                        <a:t>3,639 万</a:t>
+                        <a:t>5,953 万</a:t>
                       </a:r>
                     </a:p>
                   </a:txBody>
@@ -3335,7 +3335,7 @@
                           <a:cs typeface="Microsoft YaHei"/>
                           <a:sym typeface="Microsoft YaHei"/>
                         </a:rPr>
-                        <a:t>8,522 万</a:t>
+                        <a:t>10,836 万</a:t>
                       </a:r>
                     </a:p>
                   </a:txBody>
@@ -3577,7 +3577,7 @@
                           <a:cs typeface="Microsoft YaHei"/>
                           <a:sym typeface="Microsoft YaHei"/>
                         </a:rPr>
-                        <a:t>9,407 万</a:t>
+                        <a:t>11,942 万</a:t>
                       </a:r>
                     </a:p>
                   </a:txBody>
@@ -3715,7 +3715,7 @@
           <a:p>
             <a:pPr/>
             <a:r>
-              <a:t>项目总投资控制价 ＝ 静态投资 8,522 ＋ 基本预备费 885（不分摊到阶段，动用须逐笔审批）＝ 9,407 万。第四年起年度稳态预算 1,360 万/年。</a:t>
+              <a:t>项目总投资控制价 ＝ 静态投资 10,836 ＋ 基本预备费 1,106（不分摊到阶段，动用须逐笔审批）＝ 11,942 万。本口径只到建设期末，不含运营期成本。</a:t>
             </a:r>
           </a:p>
         </p:txBody>
@@ -3852,7 +3852,7 @@
                 <a:cs typeface="Microsoft YaHei"/>
                 <a:sym typeface="Microsoft YaHei"/>
               </a:rPr>
-              <a:t>上海 · 深圳 · 山东 三地对等 · 每地 6 台 H20 · 本地冗余、远程备用</a:t>
+              <a:t>上海 · 深圳 · 山东 三地对等 · 每地 12 台 GPU 服务器 · 本地冗余、远程备用</a:t>
             </a:r>
           </a:p>
         </p:txBody>
@@ -4132,7 +4132,7 @@
                 <a:cs typeface="Microsoft YaHei"/>
                 <a:sym typeface="Microsoft YaHei"/>
               </a:rPr>
-              <a:t>GPU 6 台 · 两组各 3 台互备</a:t>
+              <a:t>GPU 12 台 · 四组各 3 台互备</a:t>
             </a:r>
           </a:p>
           <a:p>
@@ -4151,7 +4151,7 @@
                 <a:cs typeface="Microsoft YaHei"/>
                 <a:sym typeface="Microsoft YaHei"/>
               </a:rPr>
-              <a:t>基础服务与入口 9 台 · 存储 150 TB</a:t>
+              <a:t>基础服务与入口 12 台 · 存储 200 TB</a:t>
             </a:r>
           </a:p>
           <a:p>
@@ -4412,7 +4412,7 @@
                 <a:cs typeface="Microsoft YaHei"/>
                 <a:sym typeface="Microsoft YaHei"/>
               </a:rPr>
-              <a:t>同构 6 台 · 配置与上海完全一致</a:t>
+              <a:t>同构 12 台 · 配置与上海完全一致</a:t>
             </a:r>
           </a:p>
           <a:p>
@@ -4431,7 +4431,7 @@
                 <a:cs typeface="Microsoft YaHei"/>
                 <a:sym typeface="Microsoft YaHei"/>
               </a:rPr>
-              <a:t>基础服务与入口 9 台 · 存储 150 TB</a:t>
+              <a:t>基础服务与入口 12 台 · 存储 200 TB</a:t>
             </a:r>
           </a:p>
           <a:p>
@@ -4692,7 +4692,7 @@
                 <a:cs typeface="Microsoft YaHei"/>
                 <a:sym typeface="Microsoft YaHei"/>
               </a:rPr>
-              <a:t>同构 6 台 · 配置与上海完全一致</a:t>
+              <a:t>同构 12 台 · 配置与上海完全一致</a:t>
             </a:r>
           </a:p>
           <a:p>
@@ -4711,7 +4711,7 @@
                 <a:cs typeface="Microsoft YaHei"/>
                 <a:sym typeface="Microsoft YaHei"/>
               </a:rPr>
-              <a:t>基础服务与入口 9 台 · 存储 150 TB</a:t>
+              <a:t>基础服务与入口 12 台 · 存储 200 TB</a:t>
             </a:r>
           </a:p>
           <a:p>
@@ -4934,7 +4934,7 @@
                 <a:cs typeface="Microsoft YaHei"/>
                 <a:sym typeface="Microsoft YaHei"/>
               </a:rPr>
-              <a:t>6 台分两组, 每组 3 台承载一个完整实例（3 × 8 × 141 GB ＝ 3,384 GB）。</a:t>
+              <a:t>12 台分四组, 每组 3 台承载一个完整实例。</a:t>
             </a:r>
           </a:p>
           <a:p>
@@ -4953,7 +4953,7 @@
                 <a:cs typeface="Microsoft YaHei"/>
                 <a:sym typeface="Microsoft YaHei"/>
               </a:rPr>
-              <a:t>组内单机故障由组内消化, 整组故障由另一组接管。</a:t>
+              <a:t>组内单机故障由组内消化, 整组故障由其余组接管。</a:t>
             </a:r>
           </a:p>
           <a:p>
@@ -4972,7 +4972,7 @@
                 <a:cs typeface="Microsoft YaHei"/>
                 <a:sym typeface="Microsoft YaHei"/>
               </a:rPr>
-              <a:t>两组各挂一台交换机, 互不依赖 —— 这是日常高可用, 不跨城。</a:t>
+              <a:t>四组各挂一台交换机, 互不依赖 —— 这是日常高可用, 不跨城。</a:t>
             </a:r>
           </a:p>
         </p:txBody>
@@ -5811,7 +5811,7 @@
                           <a:cs typeface="Microsoft YaHei"/>
                           <a:sym typeface="Microsoft YaHei"/>
                         </a:rPr>
-                        <a:t>6 台 · 1,800</a:t>
+                        <a:t>12 台 · 3,600</a:t>
                       </a:r>
                     </a:p>
                   </a:txBody>
@@ -5857,7 +5857,7 @@
                           <a:cs typeface="Microsoft YaHei"/>
                           <a:sym typeface="Microsoft YaHei"/>
                         </a:rPr>
-                        <a:t>18 台 · 5,400</a:t>
+                        <a:t>36 台 · 10,800</a:t>
                       </a:r>
                     </a:p>
                   </a:txBody>
@@ -5903,7 +5903,7 @@
                           <a:cs typeface="Microsoft YaHei"/>
                           <a:sym typeface="Microsoft YaHei"/>
                         </a:rPr>
-                        <a:t>三地同构, 每地 6 台 8 卡 H20</a:t>
+                        <a:t>三地同构, 每地 12 台 8 卡 GPU 服务器</a:t>
                       </a:r>
                     </a:p>
                   </a:txBody>
@@ -5997,7 +5997,7 @@
                           <a:cs typeface="Microsoft YaHei"/>
                           <a:sym typeface="Microsoft YaHei"/>
                         </a:rPr>
-                        <a:t>350</a:t>
+                        <a:t>700</a:t>
                       </a:r>
                     </a:p>
                   </a:txBody>
@@ -6043,7 +6043,7 @@
                           <a:cs typeface="Microsoft YaHei"/>
                           <a:sym typeface="Microsoft YaHei"/>
                         </a:rPr>
-                        <a:t>1,050</a:t>
+                        <a:t>2,100</a:t>
                       </a:r>
                     </a:p>
                   </a:txBody>
@@ -6089,7 +6089,7 @@
                           <a:cs typeface="Microsoft YaHei"/>
                           <a:sym typeface="Microsoft YaHei"/>
                         </a:rPr>
-                        <a:t>交换机 × 2 + 网卡 48 张, 每地一套</a:t>
+                        <a:t>交换机 × 4 + 网卡 96 张, 每地一套</a:t>
                       </a:r>
                     </a:p>
                   </a:txBody>
@@ -6183,7 +6183,7 @@
                           <a:cs typeface="Microsoft YaHei"/>
                           <a:sym typeface="Microsoft YaHei"/>
                         </a:rPr>
-                        <a:t>9 台 · 180</a:t>
+                        <a:t>12 台 · 240</a:t>
                       </a:r>
                     </a:p>
                   </a:txBody>
@@ -6229,7 +6229,7 @@
                           <a:cs typeface="Microsoft YaHei"/>
                           <a:sym typeface="Microsoft YaHei"/>
                         </a:rPr>
-                        <a:t>27 台 · 540</a:t>
+                        <a:t>36 台 · 720</a:t>
                       </a:r>
                     </a:p>
                   </a:txBody>
@@ -6369,7 +6369,7 @@
                           <a:cs typeface="Microsoft YaHei"/>
                           <a:sym typeface="Microsoft YaHei"/>
                         </a:rPr>
-                        <a:t>150 TB · 115</a:t>
+                        <a:t>200 TB · 153</a:t>
                       </a:r>
                     </a:p>
                   </a:txBody>
@@ -6415,7 +6415,7 @@
                           <a:cs typeface="Microsoft YaHei"/>
                           <a:sym typeface="Microsoft YaHei"/>
                         </a:rPr>
-                        <a:t>450 TB · 345</a:t>
+                        <a:t>600 TB · 459</a:t>
                       </a:r>
                     </a:p>
                   </a:txBody>
@@ -6555,7 +6555,7 @@
                           <a:cs typeface="Microsoft YaHei"/>
                           <a:sym typeface="Microsoft YaHei"/>
                         </a:rPr>
-                        <a:t>110</a:t>
+                        <a:t>176</a:t>
                       </a:r>
                     </a:p>
                   </a:txBody>
@@ -6601,7 +6601,7 @@
                           <a:cs typeface="Microsoft YaHei"/>
                           <a:sym typeface="Microsoft YaHei"/>
                         </a:rPr>
-                        <a:t>330</a:t>
+                        <a:t>528</a:t>
                       </a:r>
                     </a:p>
                   </a:txBody>
@@ -6741,7 +6741,7 @@
                           <a:cs typeface="Microsoft YaHei"/>
                           <a:sym typeface="Microsoft YaHei"/>
                         </a:rPr>
-                        <a:t>2,555</a:t>
+                        <a:t>4,869</a:t>
                       </a:r>
                     </a:p>
                   </a:txBody>
@@ -6787,7 +6787,7 @@
                           <a:cs typeface="Microsoft YaHei"/>
                           <a:sym typeface="Microsoft YaHei"/>
                         </a:rPr>
-                        <a:t>7,665</a:t>
+                        <a:t>14,607</a:t>
                       </a:r>
                     </a:p>
                   </a:txBody>
@@ -7289,7 +7289,7 @@
                 <a:cs typeface="Microsoft YaHei"/>
                 <a:sym typeface="Microsoft YaHei"/>
               </a:rPr>
-              <a:t>静态投资 16,663 万 · 投资控制价 18,343 万 · 单位万元</a:t>
+              <a:t>静态投资 23,605 万 · 投资控制价 25,946 万 · 单位万元</a:t>
             </a:r>
           </a:p>
         </p:txBody>
@@ -7690,7 +7690,7 @@
                           <a:cs typeface="Microsoft YaHei"/>
                           <a:sym typeface="Microsoft YaHei"/>
                         </a:rPr>
-                        <a:t>2,555</a:t>
+                        <a:t>4,869</a:t>
                       </a:r>
                     </a:p>
                   </a:txBody>
@@ -7736,7 +7736,7 @@
                           <a:cs typeface="Microsoft YaHei"/>
                           <a:sym typeface="Microsoft YaHei"/>
                         </a:rPr>
-                        <a:t>7,665</a:t>
+                        <a:t>14,607</a:t>
                       </a:r>
                     </a:p>
                   </a:txBody>
@@ -9314,7 +9314,7 @@
                           <a:cs typeface="Microsoft YaHei"/>
                           <a:sym typeface="Microsoft YaHei"/>
                         </a:rPr>
-                        <a:t>8,522</a:t>
+                        <a:t>10,836</a:t>
                       </a:r>
                     </a:p>
                   </a:txBody>
@@ -9360,7 +9360,7 @@
                           <a:cs typeface="Microsoft YaHei"/>
                           <a:sym typeface="Microsoft YaHei"/>
                         </a:rPr>
-                        <a:t>16,663</a:t>
+                        <a:t>23,605</a:t>
                       </a:r>
                     </a:p>
                   </a:txBody>
@@ -9406,7 +9406,7 @@
                           <a:cs typeface="Microsoft YaHei"/>
                           <a:sym typeface="Microsoft YaHei"/>
                         </a:rPr>
-                        <a:t>× 1.96</a:t>
+                        <a:t>× 2.18</a:t>
                       </a:r>
                     </a:p>
                   </a:txBody>
@@ -9546,7 +9546,7 @@
                           <a:cs typeface="Microsoft YaHei"/>
                           <a:sym typeface="Microsoft YaHei"/>
                         </a:rPr>
-                        <a:t>885</a:t>
+                        <a:t>1,106</a:t>
                       </a:r>
                     </a:p>
                   </a:txBody>
@@ -9592,7 +9592,7 @@
                           <a:cs typeface="Microsoft YaHei"/>
                           <a:sym typeface="Microsoft YaHei"/>
                         </a:rPr>
-                        <a:t>1,680</a:t>
+                        <a:t>2,341</a:t>
                       </a:r>
                     </a:p>
                   </a:txBody>
@@ -9778,7 +9778,7 @@
                           <a:cs typeface="Microsoft YaHei"/>
                           <a:sym typeface="Microsoft YaHei"/>
                         </a:rPr>
-                        <a:t>9,407</a:t>
+                        <a:t>11,942</a:t>
                       </a:r>
                     </a:p>
                   </a:txBody>
@@ -9824,7 +9824,7 @@
                           <a:cs typeface="Microsoft YaHei"/>
                           <a:sym typeface="Microsoft YaHei"/>
                         </a:rPr>
-                        <a:t>18,343</a:t>
+                        <a:t>25,946</a:t>
                       </a:r>
                     </a:p>
                   </a:txBody>
@@ -9870,7 +9870,7 @@
                           <a:cs typeface="Microsoft YaHei"/>
                           <a:sym typeface="Microsoft YaHei"/>
                         </a:rPr>
-                        <a:t>× 1.95</a:t>
+                        <a:t>× 2.17</a:t>
                       </a:r>
                     </a:p>
                   </a:txBody>
@@ -10072,7 +10072,7 @@
                 <a:cs typeface="Microsoft YaHei"/>
                 <a:sym typeface="Microsoft YaHei"/>
               </a:rPr>
-              <a:t>三个节点不是三倍钱。平台底座、通用智能体和知识库开发一次三地共用 —— 这三项占单节点静态投资的 26%, 复制节点时基本不重复投入。</a:t>
+              <a:t>三个节点不是三倍钱。平台底座、通用智能体和知识库开发一次三地共用 —— 这三项占单节点静态投资的 21%, 复制节点时基本不重复投入。</a:t>
             </a:r>
           </a:p>
           <a:p>
@@ -10091,7 +10091,7 @@
                 <a:cs typeface="Microsoft YaHei"/>
                 <a:sym typeface="Microsoft YaHei"/>
               </a:rPr>
-              <a:t>真正按节点复制的只有硬件（× 3.00）、安全设备（× 2.70）和现场对接部分的应用开发。整体落在 × 1.96, 即第二、三个节点各只需首节点约一半的钱。</a:t>
+              <a:t>真正按节点复制的只有硬件（× 3.00）、安全设备（× 2.70）和现场对接部分的应用开发。整体落在 × 2.18。硬件翻倍后它在总盘子里占 62%, 所以这个倍数比上一版更靠近 3。</a:t>
             </a:r>
           </a:p>
         </p:txBody>
@@ -11033,7 +11033,7 @@
                           <a:cs typeface="Microsoft YaHei"/>
                           <a:sym typeface="Microsoft YaHei"/>
                         </a:rPr>
-                        <a:t>2,555</a:t>
+                        <a:t>4,869</a:t>
                       </a:r>
                     </a:p>
                   </a:txBody>
@@ -11171,7 +11171,7 @@
                           <a:cs typeface="Microsoft YaHei"/>
                           <a:sym typeface="Microsoft YaHei"/>
                         </a:rPr>
-                        <a:t>3,782</a:t>
+                        <a:t>6,096</a:t>
                       </a:r>
                     </a:p>
                   </a:txBody>
@@ -11403,7 +11403,7 @@
                           <a:cs typeface="Microsoft YaHei"/>
                           <a:sym typeface="Microsoft YaHei"/>
                         </a:rPr>
-                        <a:t>2,555</a:t>
+                        <a:t>4,869</a:t>
                       </a:r>
                     </a:p>
                   </a:txBody>
@@ -11495,7 +11495,7 @@
                           <a:cs typeface="Microsoft YaHei"/>
                           <a:sym typeface="Microsoft YaHei"/>
                         </a:rPr>
-                        <a:t>715</a:t>
+                        <a:t>714</a:t>
                       </a:r>
                     </a:p>
                   </a:txBody>
@@ -11541,7 +11541,7 @@
                           <a:cs typeface="Microsoft YaHei"/>
                           <a:sym typeface="Microsoft YaHei"/>
                         </a:rPr>
-                        <a:t>6,109</a:t>
+                        <a:t>8,422</a:t>
                       </a:r>
                     </a:p>
                   </a:txBody>
@@ -11773,7 +11773,7 @@
                           <a:cs typeface="Microsoft YaHei"/>
                           <a:sym typeface="Microsoft YaHei"/>
                         </a:rPr>
-                        <a:t>2,555</a:t>
+                        <a:t>4,869</a:t>
                       </a:r>
                     </a:p>
                   </a:txBody>
@@ -11865,7 +11865,7 @@
                           <a:cs typeface="Microsoft YaHei"/>
                           <a:sym typeface="Microsoft YaHei"/>
                         </a:rPr>
-                        <a:t>1,217</a:t>
+                        <a:t>1,218</a:t>
                       </a:r>
                     </a:p>
                   </a:txBody>
@@ -11911,7 +11911,7 @@
                           <a:cs typeface="Microsoft YaHei"/>
                           <a:sym typeface="Microsoft YaHei"/>
                         </a:rPr>
-                        <a:t>6,772</a:t>
+                        <a:t>9,087</a:t>
                       </a:r>
                     </a:p>
                   </a:txBody>
@@ -12143,7 +12143,7 @@
                           <a:cs typeface="Microsoft YaHei"/>
                           <a:sym typeface="Microsoft YaHei"/>
                         </a:rPr>
-                        <a:t>7,665</a:t>
+                        <a:t>14,607</a:t>
                       </a:r>
                     </a:p>
                   </a:txBody>
@@ -12281,7 +12281,7 @@
                           <a:cs typeface="Microsoft YaHei"/>
                           <a:sym typeface="Microsoft YaHei"/>
                         </a:rPr>
-                        <a:t>16,663</a:t>
+                        <a:t>23,605</a:t>
                       </a:r>
                     </a:p>
                   </a:txBody>
@@ -12651,7 +12651,7 @@
                           <a:cs typeface="Microsoft YaHei"/>
                           <a:sym typeface="Microsoft YaHei"/>
                         </a:rPr>
-                        <a:t>1,680</a:t>
+                        <a:t>2,341</a:t>
                       </a:r>
                     </a:p>
                   </a:txBody>
@@ -13021,7 +13021,7 @@
                           <a:cs typeface="Microsoft YaHei"/>
                           <a:sym typeface="Microsoft YaHei"/>
                         </a:rPr>
-                        <a:t>18,343</a:t>
+                        <a:t>25,946</a:t>
                       </a:r>
                     </a:p>
                   </a:txBody>
@@ -13177,7 +13177,7 @@
                 <a:cs typeface="Microsoft YaHei"/>
                 <a:sym typeface="Microsoft YaHei"/>
               </a:rPr>
-              <a:t>硬件按节点均摊到三个阶段, 每阶段 2,555 万 —— 与单节点方案「阶段一一次到位」的口径不同, 因为节点是逐年建的。</a:t>
+              <a:t>硬件按节点均摊到三个阶段, 每阶段 4,869 万 —— 与单节点方案「阶段一一次到位」的口径不同, 因为节点是逐年建的。</a:t>
             </a:r>
           </a:p>
           <a:p>
@@ -13420,7 +13420,7 @@
                 <a:cs typeface="Microsoft YaHei"/>
                 <a:sym typeface="Microsoft YaHei"/>
               </a:rPr>
-              <a:t>三节点编制与稳态运行</a:t>
+              <a:t>三节点建设期编制</a:t>
             </a:r>
           </a:p>
         </p:txBody>
@@ -13458,7 +13458,7 @@
                 <a:cs typeface="Microsoft YaHei"/>
                 <a:sym typeface="Microsoft YaHei"/>
               </a:rPr>
-              <a:t>编制 15 → 27 人 · 稳态 1,360 → 2,329 万/年 · 单位万元</a:t>
+              <a:t>编制 15 → 27 人 · 阶段一 5 / 阶段二 17 / 阶段三 27 人 · 建设期人力已含在静态投资内</a:t>
             </a:r>
           </a:p>
         </p:txBody>
@@ -16636,816 +16636,6 @@
         <p:spPr>
           <a:xfrm>
             <a:off x="548640" y="4864608"/>
-            <a:ext cx="2103120" cy="786384"/>
-          </a:xfrm>
-          <a:prstGeom prst="rect">
-            <a:avLst/>
-          </a:prstGeom>
-          <a:solidFill>
-            <a:srgbClr val="FFFFFF"/>
-          </a:solidFill>
-          <a:ln w="6350">
-            <a:solidFill>
-              <a:srgbClr val="E3E3DE"/>
-            </a:solidFill>
-          </a:ln>
-          <a:effectLst/>
-        </p:spPr>
-        <p:style>
-          <a:lnRef idx="1">
-            <a:schemeClr val="accent1"/>
-          </a:lnRef>
-          <a:fillRef idx="3">
-            <a:schemeClr val="accent1"/>
-          </a:fillRef>
-          <a:effectRef idx="2">
-            <a:schemeClr val="accent1"/>
-          </a:effectRef>
-          <a:fontRef idx="minor">
-            <a:schemeClr val="lt1"/>
-          </a:fontRef>
-        </p:style>
-        <p:txBody>
-          <a:bodyPr rtlCol="0" anchor="ctr"/>
-          <a:lstStyle/>
-          <a:p/>
-        </p:txBody>
-      </p:sp>
-      <p:sp>
-        <p:nvSpPr>
-          <p:cNvPr id="9" name="Rectangle 8"/>
-          <p:cNvSpPr/>
-          <p:nvPr/>
-        </p:nvSpPr>
-        <p:spPr>
-          <a:xfrm>
-            <a:off x="548640" y="4864608"/>
-            <a:ext cx="54864" cy="786384"/>
-          </a:xfrm>
-          <a:prstGeom prst="rect">
-            <a:avLst/>
-          </a:prstGeom>
-          <a:solidFill>
-            <a:srgbClr val="5B6C8F"/>
-          </a:solidFill>
-          <a:ln>
-            <a:noFill/>
-          </a:ln>
-          <a:effectLst/>
-        </p:spPr>
-        <p:style>
-          <a:lnRef idx="1">
-            <a:schemeClr val="accent1"/>
-          </a:lnRef>
-          <a:fillRef idx="3">
-            <a:schemeClr val="accent1"/>
-          </a:fillRef>
-          <a:effectRef idx="2">
-            <a:schemeClr val="accent1"/>
-          </a:effectRef>
-          <a:fontRef idx="minor">
-            <a:schemeClr val="lt1"/>
-          </a:fontRef>
-        </p:style>
-        <p:txBody>
-          <a:bodyPr rtlCol="0" anchor="ctr"/>
-          <a:lstStyle/>
-          <a:p/>
-        </p:txBody>
-      </p:sp>
-      <p:sp>
-        <p:nvSpPr>
-          <p:cNvPr id="10" name="TextBox 9"/>
-          <p:cNvSpPr txBox="1"/>
-          <p:nvPr/>
-        </p:nvSpPr>
-        <p:spPr>
-          <a:xfrm>
-            <a:off x="749808" y="4992624"/>
-            <a:ext cx="1828800" cy="182880"/>
-          </a:xfrm>
-          <a:prstGeom prst="rect">
-            <a:avLst/>
-          </a:prstGeom>
-          <a:noFill/>
-        </p:spPr>
-        <p:txBody>
-          <a:bodyPr wrap="square" lIns="0" rIns="0" tIns="0" bIns="0" anchor="t">
-            <a:spAutoFit/>
-          </a:bodyPr>
-          <a:lstStyle/>
-          <a:p>
-            <a:pPr algn="l"/>
-            <a:r>
-              <a:rPr sz="900" b="0">
-                <a:solidFill>
-                  <a:srgbClr val="5C5C5C"/>
-                </a:solidFill>
-                <a:latin typeface="Microsoft YaHei"/>
-                <a:ea typeface="Microsoft YaHei"/>
-                <a:cs typeface="Microsoft YaHei"/>
-                <a:sym typeface="Microsoft YaHei"/>
-              </a:rPr>
-              <a:t>运营人力（27 人）</a:t>
-            </a:r>
-          </a:p>
-        </p:txBody>
-      </p:sp>
-      <p:sp>
-        <p:nvSpPr>
-          <p:cNvPr id="11" name="TextBox 10"/>
-          <p:cNvSpPr txBox="1"/>
-          <p:nvPr/>
-        </p:nvSpPr>
-        <p:spPr>
-          <a:xfrm>
-            <a:off x="749808" y="5230368"/>
-            <a:ext cx="1828800" cy="292608"/>
-          </a:xfrm>
-          <a:prstGeom prst="rect">
-            <a:avLst/>
-          </a:prstGeom>
-          <a:noFill/>
-        </p:spPr>
-        <p:txBody>
-          <a:bodyPr wrap="square" lIns="0" rIns="0" tIns="0" bIns="0" anchor="t">
-            <a:spAutoFit/>
-          </a:bodyPr>
-          <a:lstStyle/>
-          <a:p>
-            <a:pPr algn="l"/>
-            <a:r>
-              <a:rPr sz="1500" b="1">
-                <a:solidFill>
-                  <a:srgbClr val="1F4220"/>
-                </a:solidFill>
-                <a:latin typeface="Microsoft YaHei"/>
-                <a:ea typeface="Microsoft YaHei"/>
-                <a:cs typeface="Microsoft YaHei"/>
-                <a:sym typeface="Microsoft YaHei"/>
-              </a:rPr>
-              <a:t>1,384</a:t>
-            </a:r>
-          </a:p>
-        </p:txBody>
-      </p:sp>
-      <p:sp>
-        <p:nvSpPr>
-          <p:cNvPr id="12" name="Rectangle 11"/>
-          <p:cNvSpPr/>
-          <p:nvPr/>
-        </p:nvSpPr>
-        <p:spPr>
-          <a:xfrm>
-            <a:off x="2761488" y="4864608"/>
-            <a:ext cx="2103120" cy="786384"/>
-          </a:xfrm>
-          <a:prstGeom prst="rect">
-            <a:avLst/>
-          </a:prstGeom>
-          <a:solidFill>
-            <a:srgbClr val="FFFFFF"/>
-          </a:solidFill>
-          <a:ln w="6350">
-            <a:solidFill>
-              <a:srgbClr val="E3E3DE"/>
-            </a:solidFill>
-          </a:ln>
-          <a:effectLst/>
-        </p:spPr>
-        <p:style>
-          <a:lnRef idx="1">
-            <a:schemeClr val="accent1"/>
-          </a:lnRef>
-          <a:fillRef idx="3">
-            <a:schemeClr val="accent1"/>
-          </a:fillRef>
-          <a:effectRef idx="2">
-            <a:schemeClr val="accent1"/>
-          </a:effectRef>
-          <a:fontRef idx="minor">
-            <a:schemeClr val="lt1"/>
-          </a:fontRef>
-        </p:style>
-        <p:txBody>
-          <a:bodyPr rtlCol="0" anchor="ctr"/>
-          <a:lstStyle/>
-          <a:p/>
-        </p:txBody>
-      </p:sp>
-      <p:sp>
-        <p:nvSpPr>
-          <p:cNvPr id="13" name="Rectangle 12"/>
-          <p:cNvSpPr/>
-          <p:nvPr/>
-        </p:nvSpPr>
-        <p:spPr>
-          <a:xfrm>
-            <a:off x="2761488" y="4864608"/>
-            <a:ext cx="54864" cy="786384"/>
-          </a:xfrm>
-          <a:prstGeom prst="rect">
-            <a:avLst/>
-          </a:prstGeom>
-          <a:solidFill>
-            <a:srgbClr val="5B6C8F"/>
-          </a:solidFill>
-          <a:ln>
-            <a:noFill/>
-          </a:ln>
-          <a:effectLst/>
-        </p:spPr>
-        <p:style>
-          <a:lnRef idx="1">
-            <a:schemeClr val="accent1"/>
-          </a:lnRef>
-          <a:fillRef idx="3">
-            <a:schemeClr val="accent1"/>
-          </a:fillRef>
-          <a:effectRef idx="2">
-            <a:schemeClr val="accent1"/>
-          </a:effectRef>
-          <a:fontRef idx="minor">
-            <a:schemeClr val="lt1"/>
-          </a:fontRef>
-        </p:style>
-        <p:txBody>
-          <a:bodyPr rtlCol="0" anchor="ctr"/>
-          <a:lstStyle/>
-          <a:p/>
-        </p:txBody>
-      </p:sp>
-      <p:sp>
-        <p:nvSpPr>
-          <p:cNvPr id="14" name="TextBox 13"/>
-          <p:cNvSpPr txBox="1"/>
-          <p:nvPr/>
-        </p:nvSpPr>
-        <p:spPr>
-          <a:xfrm>
-            <a:off x="2962656" y="4992624"/>
-            <a:ext cx="1828800" cy="182880"/>
-          </a:xfrm>
-          <a:prstGeom prst="rect">
-            <a:avLst/>
-          </a:prstGeom>
-          <a:noFill/>
-        </p:spPr>
-        <p:txBody>
-          <a:bodyPr wrap="square" lIns="0" rIns="0" tIns="0" bIns="0" anchor="t">
-            <a:spAutoFit/>
-          </a:bodyPr>
-          <a:lstStyle/>
-          <a:p>
-            <a:pPr algn="l"/>
-            <a:r>
-              <a:rPr sz="900" b="0">
-                <a:solidFill>
-                  <a:srgbClr val="5C5C5C"/>
-                </a:solidFill>
-                <a:latin typeface="Microsoft YaHei"/>
-                <a:ea typeface="Microsoft YaHei"/>
-                <a:cs typeface="Microsoft YaHei"/>
-                <a:sym typeface="Microsoft YaHei"/>
-              </a:rPr>
-              <a:t>平台年服务费</a:t>
-            </a:r>
-          </a:p>
-        </p:txBody>
-      </p:sp>
-      <p:sp>
-        <p:nvSpPr>
-          <p:cNvPr id="15" name="TextBox 14"/>
-          <p:cNvSpPr txBox="1"/>
-          <p:nvPr/>
-        </p:nvSpPr>
-        <p:spPr>
-          <a:xfrm>
-            <a:off x="2962656" y="5230368"/>
-            <a:ext cx="1828800" cy="292608"/>
-          </a:xfrm>
-          <a:prstGeom prst="rect">
-            <a:avLst/>
-          </a:prstGeom>
-          <a:noFill/>
-        </p:spPr>
-        <p:txBody>
-          <a:bodyPr wrap="square" lIns="0" rIns="0" tIns="0" bIns="0" anchor="t">
-            <a:spAutoFit/>
-          </a:bodyPr>
-          <a:lstStyle/>
-          <a:p>
-            <a:pPr algn="l"/>
-            <a:r>
-              <a:rPr sz="1500" b="1">
-                <a:solidFill>
-                  <a:srgbClr val="1F4220"/>
-                </a:solidFill>
-                <a:latin typeface="Microsoft YaHei"/>
-                <a:ea typeface="Microsoft YaHei"/>
-                <a:cs typeface="Microsoft YaHei"/>
-                <a:sym typeface="Microsoft YaHei"/>
-              </a:rPr>
-              <a:t>250</a:t>
-            </a:r>
-          </a:p>
-        </p:txBody>
-      </p:sp>
-      <p:sp>
-        <p:nvSpPr>
-          <p:cNvPr id="16" name="Rectangle 15"/>
-          <p:cNvSpPr/>
-          <p:nvPr/>
-        </p:nvSpPr>
-        <p:spPr>
-          <a:xfrm>
-            <a:off x="4974336" y="4864608"/>
-            <a:ext cx="2103120" cy="786384"/>
-          </a:xfrm>
-          <a:prstGeom prst="rect">
-            <a:avLst/>
-          </a:prstGeom>
-          <a:solidFill>
-            <a:srgbClr val="FFFFFF"/>
-          </a:solidFill>
-          <a:ln w="6350">
-            <a:solidFill>
-              <a:srgbClr val="E3E3DE"/>
-            </a:solidFill>
-          </a:ln>
-          <a:effectLst/>
-        </p:spPr>
-        <p:style>
-          <a:lnRef idx="1">
-            <a:schemeClr val="accent1"/>
-          </a:lnRef>
-          <a:fillRef idx="3">
-            <a:schemeClr val="accent1"/>
-          </a:fillRef>
-          <a:effectRef idx="2">
-            <a:schemeClr val="accent1"/>
-          </a:effectRef>
-          <a:fontRef idx="minor">
-            <a:schemeClr val="lt1"/>
-          </a:fontRef>
-        </p:style>
-        <p:txBody>
-          <a:bodyPr rtlCol="0" anchor="ctr"/>
-          <a:lstStyle/>
-          <a:p/>
-        </p:txBody>
-      </p:sp>
-      <p:sp>
-        <p:nvSpPr>
-          <p:cNvPr id="17" name="Rectangle 16"/>
-          <p:cNvSpPr/>
-          <p:nvPr/>
-        </p:nvSpPr>
-        <p:spPr>
-          <a:xfrm>
-            <a:off x="4974336" y="4864608"/>
-            <a:ext cx="54864" cy="786384"/>
-          </a:xfrm>
-          <a:prstGeom prst="rect">
-            <a:avLst/>
-          </a:prstGeom>
-          <a:solidFill>
-            <a:srgbClr val="5B6C8F"/>
-          </a:solidFill>
-          <a:ln>
-            <a:noFill/>
-          </a:ln>
-          <a:effectLst/>
-        </p:spPr>
-        <p:style>
-          <a:lnRef idx="1">
-            <a:schemeClr val="accent1"/>
-          </a:lnRef>
-          <a:fillRef idx="3">
-            <a:schemeClr val="accent1"/>
-          </a:fillRef>
-          <a:effectRef idx="2">
-            <a:schemeClr val="accent1"/>
-          </a:effectRef>
-          <a:fontRef idx="minor">
-            <a:schemeClr val="lt1"/>
-          </a:fontRef>
-        </p:style>
-        <p:txBody>
-          <a:bodyPr rtlCol="0" anchor="ctr"/>
-          <a:lstStyle/>
-          <a:p/>
-        </p:txBody>
-      </p:sp>
-      <p:sp>
-        <p:nvSpPr>
-          <p:cNvPr id="18" name="TextBox 17"/>
-          <p:cNvSpPr txBox="1"/>
-          <p:nvPr/>
-        </p:nvSpPr>
-        <p:spPr>
-          <a:xfrm>
-            <a:off x="5175503" y="4992624"/>
-            <a:ext cx="1828800" cy="182880"/>
-          </a:xfrm>
-          <a:prstGeom prst="rect">
-            <a:avLst/>
-          </a:prstGeom>
-          <a:noFill/>
-        </p:spPr>
-        <p:txBody>
-          <a:bodyPr wrap="square" lIns="0" rIns="0" tIns="0" bIns="0" anchor="t">
-            <a:spAutoFit/>
-          </a:bodyPr>
-          <a:lstStyle/>
-          <a:p>
-            <a:pPr algn="l"/>
-            <a:r>
-              <a:rPr sz="900" b="0">
-                <a:solidFill>
-                  <a:srgbClr val="5C5C5C"/>
-                </a:solidFill>
-                <a:latin typeface="Microsoft YaHei"/>
-                <a:ea typeface="Microsoft YaHei"/>
-                <a:cs typeface="Microsoft YaHei"/>
-                <a:sym typeface="Microsoft YaHei"/>
-              </a:rPr>
-              <a:t>机房托管 × 3 地</a:t>
-            </a:r>
-          </a:p>
-        </p:txBody>
-      </p:sp>
-      <p:sp>
-        <p:nvSpPr>
-          <p:cNvPr id="19" name="TextBox 18"/>
-          <p:cNvSpPr txBox="1"/>
-          <p:nvPr/>
-        </p:nvSpPr>
-        <p:spPr>
-          <a:xfrm>
-            <a:off x="5175503" y="5230368"/>
-            <a:ext cx="1828800" cy="292608"/>
-          </a:xfrm>
-          <a:prstGeom prst="rect">
-            <a:avLst/>
-          </a:prstGeom>
-          <a:noFill/>
-        </p:spPr>
-        <p:txBody>
-          <a:bodyPr wrap="square" lIns="0" rIns="0" tIns="0" bIns="0" anchor="t">
-            <a:spAutoFit/>
-          </a:bodyPr>
-          <a:lstStyle/>
-          <a:p>
-            <a:pPr algn="l"/>
-            <a:r>
-              <a:rPr sz="1500" b="1">
-                <a:solidFill>
-                  <a:srgbClr val="1F4220"/>
-                </a:solidFill>
-                <a:latin typeface="Microsoft YaHei"/>
-                <a:ea typeface="Microsoft YaHei"/>
-                <a:cs typeface="Microsoft YaHei"/>
-                <a:sym typeface="Microsoft YaHei"/>
-              </a:rPr>
-              <a:t>405</a:t>
-            </a:r>
-          </a:p>
-        </p:txBody>
-      </p:sp>
-      <p:sp>
-        <p:nvSpPr>
-          <p:cNvPr id="20" name="Rectangle 19"/>
-          <p:cNvSpPr/>
-          <p:nvPr/>
-        </p:nvSpPr>
-        <p:spPr>
-          <a:xfrm>
-            <a:off x="7187183" y="4864608"/>
-            <a:ext cx="2103120" cy="786384"/>
-          </a:xfrm>
-          <a:prstGeom prst="rect">
-            <a:avLst/>
-          </a:prstGeom>
-          <a:solidFill>
-            <a:srgbClr val="FFFFFF"/>
-          </a:solidFill>
-          <a:ln w="6350">
-            <a:solidFill>
-              <a:srgbClr val="E3E3DE"/>
-            </a:solidFill>
-          </a:ln>
-          <a:effectLst/>
-        </p:spPr>
-        <p:style>
-          <a:lnRef idx="1">
-            <a:schemeClr val="accent1"/>
-          </a:lnRef>
-          <a:fillRef idx="3">
-            <a:schemeClr val="accent1"/>
-          </a:fillRef>
-          <a:effectRef idx="2">
-            <a:schemeClr val="accent1"/>
-          </a:effectRef>
-          <a:fontRef idx="minor">
-            <a:schemeClr val="lt1"/>
-          </a:fontRef>
-        </p:style>
-        <p:txBody>
-          <a:bodyPr rtlCol="0" anchor="ctr"/>
-          <a:lstStyle/>
-          <a:p/>
-        </p:txBody>
-      </p:sp>
-      <p:sp>
-        <p:nvSpPr>
-          <p:cNvPr id="21" name="Rectangle 20"/>
-          <p:cNvSpPr/>
-          <p:nvPr/>
-        </p:nvSpPr>
-        <p:spPr>
-          <a:xfrm>
-            <a:off x="7187183" y="4864608"/>
-            <a:ext cx="54864" cy="786384"/>
-          </a:xfrm>
-          <a:prstGeom prst="rect">
-            <a:avLst/>
-          </a:prstGeom>
-          <a:solidFill>
-            <a:srgbClr val="5B6C8F"/>
-          </a:solidFill>
-          <a:ln>
-            <a:noFill/>
-          </a:ln>
-          <a:effectLst/>
-        </p:spPr>
-        <p:style>
-          <a:lnRef idx="1">
-            <a:schemeClr val="accent1"/>
-          </a:lnRef>
-          <a:fillRef idx="3">
-            <a:schemeClr val="accent1"/>
-          </a:fillRef>
-          <a:effectRef idx="2">
-            <a:schemeClr val="accent1"/>
-          </a:effectRef>
-          <a:fontRef idx="minor">
-            <a:schemeClr val="lt1"/>
-          </a:fontRef>
-        </p:style>
-        <p:txBody>
-          <a:bodyPr rtlCol="0" anchor="ctr"/>
-          <a:lstStyle/>
-          <a:p/>
-        </p:txBody>
-      </p:sp>
-      <p:sp>
-        <p:nvSpPr>
-          <p:cNvPr id="22" name="TextBox 21"/>
-          <p:cNvSpPr txBox="1"/>
-          <p:nvPr/>
-        </p:nvSpPr>
-        <p:spPr>
-          <a:xfrm>
-            <a:off x="7388352" y="4992624"/>
-            <a:ext cx="1828800" cy="182880"/>
-          </a:xfrm>
-          <a:prstGeom prst="rect">
-            <a:avLst/>
-          </a:prstGeom>
-          <a:noFill/>
-        </p:spPr>
-        <p:txBody>
-          <a:bodyPr wrap="square" lIns="0" rIns="0" tIns="0" bIns="0" anchor="t">
-            <a:spAutoFit/>
-          </a:bodyPr>
-          <a:lstStyle/>
-          <a:p>
-            <a:pPr algn="l"/>
-            <a:r>
-              <a:rPr sz="900" b="0">
-                <a:solidFill>
-                  <a:srgbClr val="5C5C5C"/>
-                </a:solidFill>
-                <a:latin typeface="Microsoft YaHei"/>
-                <a:ea typeface="Microsoft YaHei"/>
-                <a:cs typeface="Microsoft YaHei"/>
-                <a:sym typeface="Microsoft YaHei"/>
-              </a:rPr>
-              <a:t>其他</a:t>
-            </a:r>
-          </a:p>
-        </p:txBody>
-      </p:sp>
-      <p:sp>
-        <p:nvSpPr>
-          <p:cNvPr id="23" name="TextBox 22"/>
-          <p:cNvSpPr txBox="1"/>
-          <p:nvPr/>
-        </p:nvSpPr>
-        <p:spPr>
-          <a:xfrm>
-            <a:off x="7388352" y="5230368"/>
-            <a:ext cx="1828800" cy="292608"/>
-          </a:xfrm>
-          <a:prstGeom prst="rect">
-            <a:avLst/>
-          </a:prstGeom>
-          <a:noFill/>
-        </p:spPr>
-        <p:txBody>
-          <a:bodyPr wrap="square" lIns="0" rIns="0" tIns="0" bIns="0" anchor="t">
-            <a:spAutoFit/>
-          </a:bodyPr>
-          <a:lstStyle/>
-          <a:p>
-            <a:pPr algn="l"/>
-            <a:r>
-              <a:rPr sz="1500" b="1">
-                <a:solidFill>
-                  <a:srgbClr val="1F4220"/>
-                </a:solidFill>
-                <a:latin typeface="Microsoft YaHei"/>
-                <a:ea typeface="Microsoft YaHei"/>
-                <a:cs typeface="Microsoft YaHei"/>
-                <a:sym typeface="Microsoft YaHei"/>
-              </a:rPr>
-              <a:t>290</a:t>
-            </a:r>
-          </a:p>
-        </p:txBody>
-      </p:sp>
-      <p:sp>
-        <p:nvSpPr>
-          <p:cNvPr id="24" name="Rectangle 23"/>
-          <p:cNvSpPr/>
-          <p:nvPr/>
-        </p:nvSpPr>
-        <p:spPr>
-          <a:xfrm>
-            <a:off x="9400032" y="4864608"/>
-            <a:ext cx="2103120" cy="786384"/>
-          </a:xfrm>
-          <a:prstGeom prst="rect">
-            <a:avLst/>
-          </a:prstGeom>
-          <a:solidFill>
-            <a:srgbClr val="E8DFC8"/>
-          </a:solidFill>
-          <a:ln w="6350">
-            <a:solidFill>
-              <a:srgbClr val="E3E3DE"/>
-            </a:solidFill>
-          </a:ln>
-          <a:effectLst/>
-        </p:spPr>
-        <p:style>
-          <a:lnRef idx="1">
-            <a:schemeClr val="accent1"/>
-          </a:lnRef>
-          <a:fillRef idx="3">
-            <a:schemeClr val="accent1"/>
-          </a:fillRef>
-          <a:effectRef idx="2">
-            <a:schemeClr val="accent1"/>
-          </a:effectRef>
-          <a:fontRef idx="minor">
-            <a:schemeClr val="lt1"/>
-          </a:fontRef>
-        </p:style>
-        <p:txBody>
-          <a:bodyPr rtlCol="0" anchor="ctr"/>
-          <a:lstStyle/>
-          <a:p/>
-        </p:txBody>
-      </p:sp>
-      <p:sp>
-        <p:nvSpPr>
-          <p:cNvPr id="25" name="Rectangle 24"/>
-          <p:cNvSpPr/>
-          <p:nvPr/>
-        </p:nvSpPr>
-        <p:spPr>
-          <a:xfrm>
-            <a:off x="9400032" y="4864608"/>
-            <a:ext cx="54864" cy="786384"/>
-          </a:xfrm>
-          <a:prstGeom prst="rect">
-            <a:avLst/>
-          </a:prstGeom>
-          <a:solidFill>
-            <a:srgbClr val="2C5F2D"/>
-          </a:solidFill>
-          <a:ln>
-            <a:noFill/>
-          </a:ln>
-          <a:effectLst/>
-        </p:spPr>
-        <p:style>
-          <a:lnRef idx="1">
-            <a:schemeClr val="accent1"/>
-          </a:lnRef>
-          <a:fillRef idx="3">
-            <a:schemeClr val="accent1"/>
-          </a:fillRef>
-          <a:effectRef idx="2">
-            <a:schemeClr val="accent1"/>
-          </a:effectRef>
-          <a:fontRef idx="minor">
-            <a:schemeClr val="lt1"/>
-          </a:fontRef>
-        </p:style>
-        <p:txBody>
-          <a:bodyPr rtlCol="0" anchor="ctr"/>
-          <a:lstStyle/>
-          <a:p/>
-        </p:txBody>
-      </p:sp>
-      <p:sp>
-        <p:nvSpPr>
-          <p:cNvPr id="26" name="TextBox 25"/>
-          <p:cNvSpPr txBox="1"/>
-          <p:nvPr/>
-        </p:nvSpPr>
-        <p:spPr>
-          <a:xfrm>
-            <a:off x="9601200" y="4992624"/>
-            <a:ext cx="1828800" cy="182880"/>
-          </a:xfrm>
-          <a:prstGeom prst="rect">
-            <a:avLst/>
-          </a:prstGeom>
-          <a:noFill/>
-        </p:spPr>
-        <p:txBody>
-          <a:bodyPr wrap="square" lIns="0" rIns="0" tIns="0" bIns="0" anchor="t">
-            <a:spAutoFit/>
-          </a:bodyPr>
-          <a:lstStyle/>
-          <a:p>
-            <a:pPr algn="l"/>
-            <a:r>
-              <a:rPr sz="900" b="0">
-                <a:solidFill>
-                  <a:srgbClr val="5C5C5C"/>
-                </a:solidFill>
-                <a:latin typeface="Microsoft YaHei"/>
-                <a:ea typeface="Microsoft YaHei"/>
-                <a:cs typeface="Microsoft YaHei"/>
-                <a:sym typeface="Microsoft YaHei"/>
-              </a:rPr>
-              <a:t>三地稳态合计</a:t>
-            </a:r>
-          </a:p>
-        </p:txBody>
-      </p:sp>
-      <p:sp>
-        <p:nvSpPr>
-          <p:cNvPr id="27" name="TextBox 26"/>
-          <p:cNvSpPr txBox="1"/>
-          <p:nvPr/>
-        </p:nvSpPr>
-        <p:spPr>
-          <a:xfrm>
-            <a:off x="9601200" y="5230368"/>
-            <a:ext cx="1828800" cy="292608"/>
-          </a:xfrm>
-          <a:prstGeom prst="rect">
-            <a:avLst/>
-          </a:prstGeom>
-          <a:noFill/>
-        </p:spPr>
-        <p:txBody>
-          <a:bodyPr wrap="square" lIns="0" rIns="0" tIns="0" bIns="0" anchor="t">
-            <a:spAutoFit/>
-          </a:bodyPr>
-          <a:lstStyle/>
-          <a:p>
-            <a:pPr algn="l"/>
-            <a:r>
-              <a:rPr sz="1500" b="1">
-                <a:solidFill>
-                  <a:srgbClr val="1F4220"/>
-                </a:solidFill>
-                <a:latin typeface="Microsoft YaHei"/>
-                <a:ea typeface="Microsoft YaHei"/>
-                <a:cs typeface="Microsoft YaHei"/>
-                <a:sym typeface="Microsoft YaHei"/>
-              </a:rPr>
-              <a:t>2,329 / 年</a:t>
-            </a:r>
-          </a:p>
-        </p:txBody>
-      </p:sp>
-      <p:sp>
-        <p:nvSpPr>
-          <p:cNvPr id="28" name="Rectangle 27"/>
-          <p:cNvSpPr/>
-          <p:nvPr/>
-        </p:nvSpPr>
-        <p:spPr>
-          <a:xfrm>
-            <a:off x="548640" y="5852160"/>
             <a:ext cx="11064240" cy="658368"/>
           </a:xfrm>
           <a:prstGeom prst="rect">
@@ -17481,13 +16671,13 @@
       </p:sp>
       <p:sp>
         <p:nvSpPr>
-          <p:cNvPr id="29" name="Rectangle 28"/>
+          <p:cNvPr id="9" name="Rectangle 8"/>
           <p:cNvSpPr/>
           <p:nvPr/>
         </p:nvSpPr>
         <p:spPr>
           <a:xfrm>
-            <a:off x="548640" y="5852160"/>
+            <a:off x="548640" y="4864608"/>
             <a:ext cx="54864" cy="658368"/>
           </a:xfrm>
           <a:prstGeom prst="rect">
@@ -17523,13 +16713,13 @@
       </p:sp>
       <p:sp>
         <p:nvSpPr>
-          <p:cNvPr id="30" name="TextBox 29"/>
+          <p:cNvPr id="10" name="TextBox 9"/>
           <p:cNvSpPr txBox="1"/>
           <p:nvPr/>
         </p:nvSpPr>
         <p:spPr>
           <a:xfrm>
-            <a:off x="749808" y="5943600"/>
+            <a:off x="749808" y="4956048"/>
             <a:ext cx="10661904" cy="475488"/>
           </a:xfrm>
           <a:prstGeom prst="rect">
@@ -17577,7 +16767,133 @@
                 <a:cs typeface="Microsoft YaHei"/>
                 <a:sym typeface="Microsoft YaHei"/>
               </a:rPr>
-              <a:t>编制爬坡 5 → 17 → 27 人。阶段一仍是 5 人、与单节点方案完全相同 —— 那一阶段本来就只建上海。增量岗位随各自节点投产到位, 不是一次到齐, 这是建设期人力只 × 1.53 而稳态 × 1.67 的原因。</a:t>
+              <a:t>编制爬坡 5 → 17 → 27 人。阶段一仍是 5 人、与单节点方案完全相同 —— 那一阶段本来就只建上海。</a:t>
+            </a:r>
+          </a:p>
+        </p:txBody>
+      </p:sp>
+      <p:sp>
+        <p:nvSpPr>
+          <p:cNvPr id="11" name="Rectangle 10"/>
+          <p:cNvSpPr/>
+          <p:nvPr/>
+        </p:nvSpPr>
+        <p:spPr>
+          <a:xfrm>
+            <a:off x="548640" y="5669280"/>
+            <a:ext cx="11064240" cy="566928"/>
+          </a:xfrm>
+          <a:prstGeom prst="rect">
+            <a:avLst/>
+          </a:prstGeom>
+          <a:solidFill>
+            <a:srgbClr val="F0EDE4"/>
+          </a:solidFill>
+          <a:ln>
+            <a:noFill/>
+          </a:ln>
+          <a:effectLst/>
+        </p:spPr>
+        <p:style>
+          <a:lnRef idx="1">
+            <a:schemeClr val="accent1"/>
+          </a:lnRef>
+          <a:fillRef idx="3">
+            <a:schemeClr val="accent1"/>
+          </a:fillRef>
+          <a:effectRef idx="2">
+            <a:schemeClr val="accent1"/>
+          </a:effectRef>
+          <a:fontRef idx="minor">
+            <a:schemeClr val="lt1"/>
+          </a:fontRef>
+        </p:style>
+        <p:txBody>
+          <a:bodyPr rtlCol="0" anchor="ctr"/>
+          <a:lstStyle/>
+          <a:p/>
+        </p:txBody>
+      </p:sp>
+      <p:sp>
+        <p:nvSpPr>
+          <p:cNvPr id="12" name="Rectangle 11"/>
+          <p:cNvSpPr/>
+          <p:nvPr/>
+        </p:nvSpPr>
+        <p:spPr>
+          <a:xfrm>
+            <a:off x="548640" y="5669280"/>
+            <a:ext cx="54864" cy="566928"/>
+          </a:xfrm>
+          <a:prstGeom prst="rect">
+            <a:avLst/>
+          </a:prstGeom>
+          <a:solidFill>
+            <a:srgbClr val="5B6C8F"/>
+          </a:solidFill>
+          <a:ln>
+            <a:noFill/>
+          </a:ln>
+          <a:effectLst/>
+        </p:spPr>
+        <p:style>
+          <a:lnRef idx="1">
+            <a:schemeClr val="accent1"/>
+          </a:lnRef>
+          <a:fillRef idx="3">
+            <a:schemeClr val="accent1"/>
+          </a:fillRef>
+          <a:effectRef idx="2">
+            <a:schemeClr val="accent1"/>
+          </a:effectRef>
+          <a:fontRef idx="minor">
+            <a:schemeClr val="lt1"/>
+          </a:fontRef>
+        </p:style>
+        <p:txBody>
+          <a:bodyPr rtlCol="0" anchor="ctr"/>
+          <a:lstStyle/>
+          <a:p/>
+        </p:txBody>
+      </p:sp>
+      <p:sp>
+        <p:nvSpPr>
+          <p:cNvPr id="13" name="TextBox 12"/>
+          <p:cNvSpPr txBox="1"/>
+          <p:nvPr/>
+        </p:nvSpPr>
+        <p:spPr>
+          <a:xfrm>
+            <a:off x="749808" y="5760720"/>
+            <a:ext cx="10661904" cy="384048"/>
+          </a:xfrm>
+          <a:prstGeom prst="rect">
+            <a:avLst/>
+          </a:prstGeom>
+          <a:noFill/>
+        </p:spPr>
+        <p:txBody>
+          <a:bodyPr wrap="square" lIns="0" rIns="0" tIns="0" bIns="0" anchor="ctr">
+            <a:spAutoFit/>
+          </a:bodyPr>
+          <a:lstStyle/>
+          <a:p>
+            <a:pPr algn="l">
+              <a:lnSpc>
+                <a:spcPct val="125000"/>
+              </a:lnSpc>
+            </a:pPr>
+            <a:r>
+              <a:rPr sz="900" b="0">
+                <a:solidFill>
+                  <a:srgbClr val="1A1A1A"/>
+                </a:solidFill>
+                <a:latin typeface="Microsoft YaHei"/>
+                <a:ea typeface="Microsoft YaHei"/>
+                <a:cs typeface="Microsoft YaHei"/>
+                <a:sym typeface="Microsoft YaHei"/>
+              </a:rPr>
+              <a:t>本页只讲建设期编制, 对应静态投资里的「运营人力」科目。建成后两个中心仍是常设组织, 那部分人力走常规运营预算, 不在本次投资口径内。</a:t>
             </a:r>
           </a:p>
         </p:txBody>
@@ -17675,7 +16991,7 @@
                 <a:cs typeface="Microsoft YaHei"/>
                 <a:sym typeface="Microsoft YaHei"/>
               </a:rPr>
-              <a:t>3 亿的口径 · 建设 3 年 ＋ 运营 5 年</a:t>
+              <a:t>建设期投资 · 三年</a:t>
             </a:r>
           </a:p>
         </p:txBody>
@@ -17713,7 +17029,7 @@
                 <a:cs typeface="Microsoft YaHei"/>
                 <a:sym typeface="Microsoft YaHei"/>
               </a:rPr>
-              <a:t>含运营期, 不只是建设期 · 单位万元</a:t>
+              <a:t>每年一个节点 · 不含运营期成本 · 单位万元</a:t>
             </a:r>
           </a:p>
         </p:txBody>
@@ -17913,7 +17229,7 @@
                 <a:cs typeface="Microsoft YaHei"/>
                 <a:sym typeface="Microsoft YaHei"/>
               </a:rPr>
-              <a:t>建设期 3 年</a:t>
+              <a:t>静态投资</a:t>
             </a:r>
           </a:p>
         </p:txBody>
@@ -17951,7 +17267,7 @@
                 <a:cs typeface="Microsoft YaHei"/>
                 <a:sym typeface="Microsoft YaHei"/>
               </a:rPr>
-              <a:t>18,343</a:t>
+              <a:t>23,605</a:t>
             </a:r>
           </a:p>
         </p:txBody>
@@ -17989,7 +17305,7 @@
                 <a:cs typeface="Microsoft YaHei"/>
                 <a:sym typeface="Microsoft YaHei"/>
               </a:rPr>
-              <a:t>投资控制价 · 含预备费</a:t>
+              <a:t>三年建设, 三个节点</a:t>
             </a:r>
           </a:p>
         </p:txBody>
@@ -18113,7 +17429,7 @@
                 <a:cs typeface="Microsoft YaHei"/>
                 <a:sym typeface="Microsoft YaHei"/>
               </a:rPr>
-              <a:t>运营期 5 年</a:t>
+              <a:t>＋ 基本预备费</a:t>
             </a:r>
           </a:p>
         </p:txBody>
@@ -18151,7 +17467,7 @@
                 <a:cs typeface="Microsoft YaHei"/>
                 <a:sym typeface="Microsoft YaHei"/>
               </a:rPr>
-              <a:t>11,657</a:t>
+              <a:t>2,341</a:t>
             </a:r>
           </a:p>
         </p:txBody>
@@ -18189,7 +17505,7 @@
                 <a:cs typeface="Microsoft YaHei"/>
                 <a:sym typeface="Microsoft YaHei"/>
               </a:rPr>
-              <a:t>按 2,329 万/年 稳态</a:t>
+              <a:t>分档计提, 不分摊到阶段</a:t>
             </a:r>
           </a:p>
         </p:txBody>
@@ -18313,7 +17629,7 @@
                 <a:cs typeface="Microsoft YaHei"/>
                 <a:sym typeface="Microsoft YaHei"/>
               </a:rPr>
-              <a:t>合计</a:t>
+              <a:t>＝ 投资控制价</a:t>
             </a:r>
           </a:p>
         </p:txBody>
@@ -18351,7 +17667,7 @@
                 <a:cs typeface="Microsoft YaHei"/>
                 <a:sym typeface="Microsoft YaHei"/>
               </a:rPr>
-              <a:t>30,000</a:t>
+              <a:t>25,946</a:t>
             </a:r>
           </a:p>
         </p:txBody>
@@ -18389,7 +17705,7 @@
                 <a:cs typeface="Microsoft YaHei"/>
                 <a:sym typeface="Microsoft YaHei"/>
               </a:rPr>
-              <a:t>≈ 八年周期</a:t>
+              <a:t>2.59 亿 · 在 3 亿以内</a:t>
             </a:r>
           </a:p>
         </p:txBody>
@@ -18404,7 +17720,7 @@
         </p:nvGraphicFramePr>
         <p:xfrm>
           <a:off x="548640" y="2743200"/>
-          <a:ext cx="11064240" cy="2304288"/>
+          <a:ext cx="11064240" cy="1975104"/>
         </p:xfrm>
         <a:graphic>
           <a:graphicData uri="http://schemas.openxmlformats.org/drawingml/2006/table">
@@ -18667,7 +17983,7 @@
                           <a:cs typeface="Microsoft YaHei"/>
                           <a:sym typeface="Microsoft YaHei"/>
                         </a:rPr>
-                        <a:t>上海节点 + 平台底座 + 通用应用起步</a:t>
+                        <a:t>上海节点（12 台）＋ 平台底座 ＋ 通用应用起步</a:t>
                       </a:r>
                     </a:p>
                   </a:txBody>
@@ -18713,7 +18029,7 @@
                           <a:cs typeface="Microsoft YaHei"/>
                           <a:sym typeface="Microsoft YaHei"/>
                         </a:rPr>
-                        <a:t>3,782</a:t>
+                        <a:t>6,096</a:t>
                       </a:r>
                     </a:p>
                   </a:txBody>
@@ -18759,7 +18075,7 @@
                           <a:cs typeface="Microsoft YaHei"/>
                           <a:sym typeface="Microsoft YaHei"/>
                         </a:rPr>
-                        <a:t>3,782</a:t>
+                        <a:t>6,096</a:t>
                       </a:r>
                     </a:p>
                   </a:txBody>
@@ -18853,7 +18169,7 @@
                           <a:cs typeface="Microsoft YaHei"/>
                           <a:sym typeface="Microsoft YaHei"/>
                         </a:rPr>
-                        <a:t>深圳节点 + 应用开发主体 + 三地贯通设计</a:t>
+                        <a:t>深圳节点（12 台）＋ 应用开发主体 ＋ 三地贯通设计</a:t>
                       </a:r>
                     </a:p>
                   </a:txBody>
@@ -18899,7 +18215,7 @@
                           <a:cs typeface="Microsoft YaHei"/>
                           <a:sym typeface="Microsoft YaHei"/>
                         </a:rPr>
-                        <a:t>6,109</a:t>
+                        <a:t>8,422</a:t>
                       </a:r>
                     </a:p>
                   </a:txBody>
@@ -18945,7 +18261,7 @@
                           <a:cs typeface="Microsoft YaHei"/>
                           <a:sym typeface="Microsoft YaHei"/>
                         </a:rPr>
-                        <a:t>9,891</a:t>
+                        <a:t>14,518</a:t>
                       </a:r>
                     </a:p>
                   </a:txBody>
@@ -19039,7 +18355,7 @@
                           <a:cs typeface="Microsoft YaHei"/>
                           <a:sym typeface="Microsoft YaHei"/>
                         </a:rPr>
-                        <a:t>山东节点 + 三地现场对接 + 远程备用演练</a:t>
+                        <a:t>山东节点（12 台）＋ 三地现场对接 ＋ 远程备用演练</a:t>
                       </a:r>
                     </a:p>
                   </a:txBody>
@@ -19085,7 +18401,7 @@
                           <a:cs typeface="Microsoft YaHei"/>
                           <a:sym typeface="Microsoft YaHei"/>
                         </a:rPr>
-                        <a:t>6,772</a:t>
+                        <a:t>9,087</a:t>
                       </a:r>
                     </a:p>
                   </a:txBody>
@@ -19131,7 +18447,7 @@
                           <a:cs typeface="Microsoft YaHei"/>
                           <a:sym typeface="Microsoft YaHei"/>
                         </a:rPr>
-                        <a:t>16,663</a:t>
+                        <a:t>23,605</a:t>
                       </a:r>
                     </a:p>
                   </a:txBody>
@@ -19271,7 +18587,7 @@
                           <a:cs typeface="Microsoft YaHei"/>
                           <a:sym typeface="Microsoft YaHei"/>
                         </a:rPr>
-                        <a:t>1,680</a:t>
+                        <a:t>2,341</a:t>
                       </a:r>
                     </a:p>
                   </a:txBody>
@@ -19317,7 +18633,7 @@
                           <a:cs typeface="Microsoft YaHei"/>
                           <a:sym typeface="Microsoft YaHei"/>
                         </a:rPr>
-                        <a:t>18,343</a:t>
+                        <a:t>25,946</a:t>
                       </a:r>
                     </a:p>
                   </a:txBody>
@@ -19356,16 +18672,16 @@
                     <a:p>
                       <a:pPr algn="l"/>
                       <a:r>
-                        <a:rPr sz="1000" b="0">
-                          <a:solidFill>
-                            <a:srgbClr val="1A1A1A"/>
-                          </a:solidFill>
-                          <a:latin typeface="Microsoft YaHei"/>
-                          <a:ea typeface="Microsoft YaHei"/>
-                          <a:cs typeface="Microsoft YaHei"/>
-                          <a:sym typeface="Microsoft YaHei"/>
-                        </a:rPr>
-                        <a:t>第 4–8 年</a:t>
+                        <a:rPr sz="1000" b="1">
+                          <a:solidFill>
+                            <a:srgbClr val="1A1A1A"/>
+                          </a:solidFill>
+                          <a:latin typeface="Microsoft YaHei"/>
+                          <a:ea typeface="Microsoft YaHei"/>
+                          <a:cs typeface="Microsoft YaHei"/>
+                          <a:sym typeface="Microsoft YaHei"/>
+                        </a:rPr>
+                        <a:t>投资控制价</a:t>
                       </a:r>
                     </a:p>
                   </a:txBody>
@@ -19391,7 +18707,7 @@
                       </a:solidFill>
                     </a:lnL>
                     <a:solidFill>
-                      <a:srgbClr val="F5F1E8"/>
+                      <a:srgbClr val="E8DFC8"/>
                     </a:solidFill>
                   </a:tcPr>
                 </a:tc>
@@ -19402,16 +18718,16 @@
                     <a:p>
                       <a:pPr algn="l"/>
                       <a:r>
-                        <a:rPr sz="1000" b="0">
-                          <a:solidFill>
-                            <a:srgbClr val="1A1A1A"/>
-                          </a:solidFill>
-                          <a:latin typeface="Microsoft YaHei"/>
-                          <a:ea typeface="Microsoft YaHei"/>
-                          <a:cs typeface="Microsoft YaHei"/>
-                          <a:sym typeface="Microsoft YaHei"/>
-                        </a:rPr>
-                        <a:t>三地稳态运行 × 5 年（2,329 万/年）</a:t>
+                        <a:rPr sz="1000" b="1">
+                          <a:solidFill>
+                            <a:srgbClr val="1A1A1A"/>
+                          </a:solidFill>
+                          <a:latin typeface="Microsoft YaHei"/>
+                          <a:ea typeface="Microsoft YaHei"/>
+                          <a:cs typeface="Microsoft YaHei"/>
+                          <a:sym typeface="Microsoft YaHei"/>
+                        </a:rPr>
+                        <a:t>建设三年合计</a:t>
                       </a:r>
                     </a:p>
                   </a:txBody>
@@ -19437,7 +18753,7 @@
                       </a:solidFill>
                     </a:lnL>
                     <a:solidFill>
-                      <a:srgbClr val="F5F1E8"/>
+                      <a:srgbClr val="E8DFC8"/>
                     </a:solidFill>
                   </a:tcPr>
                 </a:tc>
@@ -19448,100 +18764,6 @@
                     <a:p>
                       <a:pPr algn="r"/>
                       <a:r>
-                        <a:rPr sz="1000" b="0">
-                          <a:solidFill>
-                            <a:srgbClr val="1A1A1A"/>
-                          </a:solidFill>
-                          <a:latin typeface="Microsoft YaHei"/>
-                          <a:ea typeface="Microsoft YaHei"/>
-                          <a:cs typeface="Microsoft YaHei"/>
-                          <a:sym typeface="Microsoft YaHei"/>
-                        </a:rPr>
-                        <a:t>11,657</a:t>
-                      </a:r>
-                    </a:p>
-                  </a:txBody>
-                  <a:tcPr marL="54864" marR="54864" marT="54864" marB="54864" anchor="ctr">
-                    <a:lnB w="6350">
-                      <a:solidFill>
-                        <a:srgbClr val="E3E3DE"/>
-                      </a:solidFill>
-                    </a:lnB>
-                    <a:lnT w="6350">
-                      <a:solidFill>
-                        <a:srgbClr val="E3E3DE"/>
-                      </a:solidFill>
-                    </a:lnT>
-                    <a:lnR w="6350">
-                      <a:solidFill>
-                        <a:srgbClr val="E3E3DE"/>
-                      </a:solidFill>
-                    </a:lnR>
-                    <a:lnL w="6350">
-                      <a:solidFill>
-                        <a:srgbClr val="E3E3DE"/>
-                      </a:solidFill>
-                    </a:lnL>
-                    <a:solidFill>
-                      <a:srgbClr val="F5F1E8"/>
-                    </a:solidFill>
-                  </a:tcPr>
-                </a:tc>
-                <a:tc>
-                  <a:txBody>
-                    <a:bodyPr wrap="square"/>
-                    <a:lstStyle/>
-                    <a:p>
-                      <a:pPr algn="r"/>
-                      <a:r>
-                        <a:rPr sz="1000" b="0">
-                          <a:solidFill>
-                            <a:srgbClr val="1A1A1A"/>
-                          </a:solidFill>
-                          <a:latin typeface="Microsoft YaHei"/>
-                          <a:ea typeface="Microsoft YaHei"/>
-                          <a:cs typeface="Microsoft YaHei"/>
-                          <a:sym typeface="Microsoft YaHei"/>
-                        </a:rPr>
-                        <a:t>30,000</a:t>
-                      </a:r>
-                    </a:p>
-                  </a:txBody>
-                  <a:tcPr marL="54864" marR="54864" marT="54864" marB="54864" anchor="ctr">
-                    <a:lnB w="6350">
-                      <a:solidFill>
-                        <a:srgbClr val="E3E3DE"/>
-                      </a:solidFill>
-                    </a:lnB>
-                    <a:lnT w="6350">
-                      <a:solidFill>
-                        <a:srgbClr val="E3E3DE"/>
-                      </a:solidFill>
-                    </a:lnT>
-                    <a:lnR w="6350">
-                      <a:solidFill>
-                        <a:srgbClr val="E3E3DE"/>
-                      </a:solidFill>
-                    </a:lnR>
-                    <a:lnL w="6350">
-                      <a:solidFill>
-                        <a:srgbClr val="E3E3DE"/>
-                      </a:solidFill>
-                    </a:lnL>
-                    <a:solidFill>
-                      <a:srgbClr val="F5F1E8"/>
-                    </a:solidFill>
-                  </a:tcPr>
-                </a:tc>
-              </a:tr>
-              <a:tr h="329184">
-                <a:tc>
-                  <a:txBody>
-                    <a:bodyPr wrap="square"/>
-                    <a:lstStyle/>
-                    <a:p>
-                      <a:pPr algn="l"/>
-                      <a:r>
                         <a:rPr sz="1000" b="1">
                           <a:solidFill>
                             <a:srgbClr val="1A1A1A"/>
@@ -19551,99 +18773,7 @@
                           <a:cs typeface="Microsoft YaHei"/>
                           <a:sym typeface="Microsoft YaHei"/>
                         </a:rPr>
-                        <a:t>合计</a:t>
-                      </a:r>
-                    </a:p>
-                  </a:txBody>
-                  <a:tcPr marL="54864" marR="54864" marT="54864" marB="54864" anchor="ctr">
-                    <a:lnB w="6350">
-                      <a:solidFill>
-                        <a:srgbClr val="E3E3DE"/>
-                      </a:solidFill>
-                    </a:lnB>
-                    <a:lnT w="6350">
-                      <a:solidFill>
-                        <a:srgbClr val="E3E3DE"/>
-                      </a:solidFill>
-                    </a:lnT>
-                    <a:lnR w="6350">
-                      <a:solidFill>
-                        <a:srgbClr val="E3E3DE"/>
-                      </a:solidFill>
-                    </a:lnR>
-                    <a:lnL w="6350">
-                      <a:solidFill>
-                        <a:srgbClr val="E3E3DE"/>
-                      </a:solidFill>
-                    </a:lnL>
-                    <a:solidFill>
-                      <a:srgbClr val="E8DFC8"/>
-                    </a:solidFill>
-                  </a:tcPr>
-                </a:tc>
-                <a:tc>
-                  <a:txBody>
-                    <a:bodyPr wrap="square"/>
-                    <a:lstStyle/>
-                    <a:p>
-                      <a:pPr algn="l"/>
-                      <a:r>
-                        <a:rPr sz="1000" b="1">
-                          <a:solidFill>
-                            <a:srgbClr val="1A1A1A"/>
-                          </a:solidFill>
-                          <a:latin typeface="Microsoft YaHei"/>
-                          <a:ea typeface="Microsoft YaHei"/>
-                          <a:cs typeface="Microsoft YaHei"/>
-                          <a:sym typeface="Microsoft YaHei"/>
-                        </a:rPr>
-                        <a:t>建设 3 年 ＋ 运营 5 年</a:t>
-                      </a:r>
-                    </a:p>
-                  </a:txBody>
-                  <a:tcPr marL="54864" marR="54864" marT="54864" marB="54864" anchor="ctr">
-                    <a:lnB w="6350">
-                      <a:solidFill>
-                        <a:srgbClr val="E3E3DE"/>
-                      </a:solidFill>
-                    </a:lnB>
-                    <a:lnT w="6350">
-                      <a:solidFill>
-                        <a:srgbClr val="E3E3DE"/>
-                      </a:solidFill>
-                    </a:lnT>
-                    <a:lnR w="6350">
-                      <a:solidFill>
-                        <a:srgbClr val="E3E3DE"/>
-                      </a:solidFill>
-                    </a:lnR>
-                    <a:lnL w="6350">
-                      <a:solidFill>
-                        <a:srgbClr val="E3E3DE"/>
-                      </a:solidFill>
-                    </a:lnL>
-                    <a:solidFill>
-                      <a:srgbClr val="E8DFC8"/>
-                    </a:solidFill>
-                  </a:tcPr>
-                </a:tc>
-                <a:tc>
-                  <a:txBody>
-                    <a:bodyPr wrap="square"/>
-                    <a:lstStyle/>
-                    <a:p>
-                      <a:pPr algn="r"/>
-                      <a:r>
-                        <a:rPr sz="1000" b="1">
-                          <a:solidFill>
-                            <a:srgbClr val="1A1A1A"/>
-                          </a:solidFill>
-                          <a:latin typeface="Microsoft YaHei"/>
-                          <a:ea typeface="Microsoft YaHei"/>
-                          <a:cs typeface="Microsoft YaHei"/>
-                          <a:sym typeface="Microsoft YaHei"/>
-                        </a:rPr>
-                        <a:t>30,000</a:t>
+                        <a:t>25,946</a:t>
                       </a:r>
                     </a:p>
                   </a:txBody>
@@ -19732,7 +18862,7 @@
         </p:nvSpPr>
         <p:spPr>
           <a:xfrm>
-            <a:off x="548640" y="5138928"/>
+            <a:off x="548640" y="4846320"/>
             <a:ext cx="11064240" cy="822960"/>
           </a:xfrm>
           <a:prstGeom prst="rect">
@@ -19774,7 +18904,7 @@
         </p:nvSpPr>
         <p:spPr>
           <a:xfrm>
-            <a:off x="548640" y="5138928"/>
+            <a:off x="548640" y="4846320"/>
             <a:ext cx="54864" cy="822960"/>
           </a:xfrm>
           <a:prstGeom prst="rect">
@@ -19816,7 +18946,7 @@
         </p:nvSpPr>
         <p:spPr>
           <a:xfrm>
-            <a:off x="749808" y="5230368"/>
+            <a:off x="749808" y="4937759"/>
             <a:ext cx="10661904" cy="640080"/>
           </a:xfrm>
           <a:prstGeom prst="rect">
@@ -19845,7 +18975,7 @@
                 <a:cs typeface="Microsoft YaHei"/>
                 <a:sym typeface="Microsoft YaHei"/>
               </a:rPr>
-              <a:t>3 亿含运营期。按本表口径, 第 8 年末资金用尽 —— 之后两个中心仍需按 2,329 万/年 列入常规预算。两个中心是常设组织, 不是一次性工程: 静态投资里已有 19% 是人员成本, 性质上就是运营支出。</a:t>
+              <a:t>控制价 25,946 万 ＝ 2.59 亿, 在 3 亿以内, 余量 4,054 万（14%）。余量留给采购报价与汇率波动, 不作为可自由使用的额度。</a:t>
             </a:r>
           </a:p>
           <a:p>
@@ -19864,7 +18994,7 @@
                 <a:cs typeface="Microsoft YaHei"/>
                 <a:sym typeface="Microsoft YaHei"/>
               </a:rPr>
-              <a:t>第 4 年是本表之外的第一个压力点: 上海节点的 GPU 按第 8 页口径到期换代（1,800 万）, 而那时运营资金才用掉约两成 —— 换代不在 3 亿内, 见第 16 页。</a:t>
+              <a:t>硬件占静态投资 62%, 是最大的单一科目 —— 这个项目以硬件投入为主, 采购谈判的权重要放在这里。</a:t>
             </a:r>
           </a:p>
         </p:txBody>
@@ -19877,8 +19007,8 @@
         </p:nvSpPr>
         <p:spPr>
           <a:xfrm>
-            <a:off x="548640" y="6108192"/>
-            <a:ext cx="11064240" cy="475488"/>
+            <a:off x="548640" y="5815584"/>
+            <a:ext cx="11064240" cy="566928"/>
           </a:xfrm>
           <a:prstGeom prst="rect">
             <a:avLst/>
@@ -19919,8 +19049,8 @@
         </p:nvSpPr>
         <p:spPr>
           <a:xfrm>
-            <a:off x="548640" y="6108192"/>
-            <a:ext cx="54864" cy="475488"/>
+            <a:off x="548640" y="5815584"/>
+            <a:ext cx="54864" cy="566928"/>
           </a:xfrm>
           <a:prstGeom prst="rect">
             <a:avLst/>
@@ -19961,8 +19091,8 @@
         </p:nvSpPr>
         <p:spPr>
           <a:xfrm>
-            <a:off x="749808" y="6199631"/>
-            <a:ext cx="10661904" cy="292608"/>
+            <a:off x="749808" y="5907024"/>
+            <a:ext cx="10661904" cy="384048"/>
           </a:xfrm>
           <a:prstGeom prst="rect">
             <a:avLst/>
@@ -19990,7 +19120,7 @@
                 <a:cs typeface="Microsoft YaHei"/>
                 <a:sym typeface="Microsoft YaHei"/>
               </a:rPr>
-              <a:t>两个可调项: 运营期每多一年需追加 2,329 万; 若只建两地, 控制价约降至 13,900 万, 同样 3 亿可支撑约 7 年运营。两种都可测算, 但需另行决策。</a:t>
+              <a:t>本表只到建设期末。两个中心建成后仍是常设组织, 人力、机房托管、平台年服务费等年度支出走常规运营预算, 不计入本项目投资控制价。</a:t>
             </a:r>
           </a:p>
         </p:txBody>
@@ -20364,7 +19494,7 @@
                 <a:cs typeface="Microsoft YaHei"/>
                 <a:sym typeface="Microsoft YaHei"/>
               </a:rPr>
-              <a:t>八年窗口内约 9,000 万</a:t>
+              <a:t>每轮约 10,800 万</a:t>
             </a:r>
           </a:p>
         </p:txBody>
@@ -20406,7 +19536,7 @@
                 <a:cs typeface="Microsoft YaHei"/>
                 <a:sym typeface="Microsoft YaHei"/>
               </a:rPr>
-              <a:t>第 8 页口径: 六台 GPU 三年后换代。三地分三年投产, 第一轮落在第 4、5、6 年（5,400 万）; 按同周期续推, 上海、深圳的第二轮落在第 7、8 年（3,600 万）。全部在运营期内发生。</a:t>
+              <a:t>第 8 页口径: GPU 三年后换代。三地各 12 台分三年投产, 第一轮落在第 4、5、6 年, 每地 3,600 万、三地合计 10,800 万。金额比建设期硬件本身还大, 必须单列。</a:t>
             </a:r>
           </a:p>
         </p:txBody>
@@ -21552,7 +20682,7 @@
                 <a:cs typeface="Microsoft YaHei"/>
                 <a:sym typeface="Microsoft YaHei"/>
               </a:rPr>
-              <a:t>六项都不在 3 亿内, 但其中两项会在运营期内实打实发生: GPU 换代（八年窗口内约 9,000 万, 首笔在第 4 年）与应用迭代（350 万/年 × 5 年 ＝ 1,750 万）, 合计 10,750 万, 相当于 3 亿的 36%。</a:t>
+              <a:t>六项都不在 3 亿内, 但其中两项会在运营期内实打实发生: GPU 换代（每轮约 10,800 万, 首笔在第 4 年）与应用迭代（350 万/年 × 5 年 ＝ 1,750 万）, 合计 10,750 万, 相当于 3 亿的 36%。</a:t>
             </a:r>
           </a:p>
           <a:p>
@@ -21571,7 +20701,7 @@
                 <a:cs typeface="Microsoft YaHei"/>
                 <a:sym typeface="Microsoft YaHei"/>
               </a:rPr>
-              <a:t>换代不是周期末的事 —— 第 4 年就要出第一笔, 那时运营资金才用掉两成。建议在立项文件里单列一条资本开支路径, 与本方案同步报批。</a:t>
+              <a:t>建议在立项文件里把它写成一条独立的资本开支路径, 与本方案同步报批, 不要等设备到寿再讨论。</a:t>
             </a:r>
           </a:p>
         </p:txBody>
@@ -23770,7 +22900,7 @@
                           <a:cs typeface="Microsoft YaHei"/>
                           <a:sym typeface="Microsoft YaHei"/>
                         </a:rPr>
-                        <a:t>认证智能体（认证知识库 → 材料清单 → 申报草稿 → 法规监测）、招商智能体；渠道中心政府关系与合作伙伴建线；基础设施采购与部署（六台 GPU 及基础服务节点一次性）</a:t>
+                        <a:t>认证智能体（认证知识库 → 材料清单 → 申报草稿 → 法规监测）、招商智能体；渠道中心政府关系与合作伙伴建线；基础设施采购与部署（12 台 GPU 及基础服务节点一次性）</a:t>
                       </a:r>
                     </a:p>
                   </a:txBody>
@@ -24543,7 +23673,7 @@
                         </a:defRPr>
                       </a:pPr>
                       <a:r>
-                        <a:t>静态投资 8,522</a:t>
+                        <a:t>静态投资 10,836</a:t>
                       </a:r>
                     </a:p>
                     <a:p>
@@ -24559,7 +23689,7 @@
                         </a:defRPr>
                       </a:pPr>
                       <a:r>
-                        <a:t>＋预备费 885</a:t>
+                        <a:t>＋预备费 1,106</a:t>
                       </a:r>
                     </a:p>
                     <a:p>
@@ -24575,7 +23705,7 @@
                         </a:defRPr>
                       </a:pPr>
                       <a:r>
-                        <a:t>＝控制价 9,407 万</a:t>
+                        <a:t>＝控制价 11,942 万</a:t>
                       </a:r>
                     </a:p>
                   </a:txBody>
@@ -30652,7 +29782,7 @@
           <a:p>
             <a:pPr/>
             <a:r>
-              <a:t>六台 GPU · 9 台基础服务与入口节点 · 阶段一一次性采购自持 · 单位万元</a:t>
+              <a:t>十二台 GPU · 12 台基础服务与入口节点 · 阶段一一次性采购自持 · 单位万元</a:t>
             </a:r>
           </a:p>
         </p:txBody>
@@ -30988,7 +30118,7 @@
                           <a:cs typeface="Microsoft YaHei"/>
                           <a:sym typeface="Microsoft YaHei"/>
                         </a:rPr>
-                        <a:t>GPU 服务器 × 6</a:t>
+                        <a:t>GPU 服务器 × 12</a:t>
                       </a:r>
                     </a:p>
                   </a:txBody>
@@ -31035,7 +30165,7 @@
                         </a:defRPr>
                       </a:pPr>
                       <a:r>
-                        <a:t>8 卡 H20（141G / HBM3e），单机 1,128GB 显存</a:t>
+                        <a:t>8 卡 GPU 服务器，单机满配显存</a:t>
                       </a:r>
                     </a:p>
                     <a:p>
@@ -31051,7 +30181,7 @@
                         </a:defRPr>
                       </a:pPr>
                       <a:r>
-                        <a:t>三台一组：3 × 8 × 141GB = 3,384GB，承载一个完整实例；两组互备</a:t>
+                        <a:t>三台一组承载一个完整实例；四组互备</a:t>
                       </a:r>
                     </a:p>
                   </a:txBody>
@@ -31098,23 +30228,7 @@
                         </a:defRPr>
                       </a:pPr>
                       <a:r>
-                        <a:t>300 / 台</a:t>
-                      </a:r>
-                    </a:p>
-                    <a:p>
-                      <a:pPr algn="l">
-                        <a:defRPr sz="1000">
-                          <a:solidFill>
-                            <a:srgbClr val="1A1A1A"/>
-                          </a:solidFill>
-                          <a:latin typeface="Microsoft YaHei"/>
-                          <a:ea typeface="Microsoft YaHei"/>
-                          <a:cs typeface="Microsoft YaHei"/>
-                          <a:sym typeface="Microsoft YaHei"/>
-                        </a:defRPr>
-                      </a:pPr>
-                      <a:r>
-                        <a:t>× 6 = 1,800</a:t>
+                        <a:t>300 / 台 × 12 = 3,600</a:t>
                       </a:r>
                     </a:p>
                   </a:txBody>
@@ -31162,7 +30276,7 @@
                           <a:cs typeface="Microsoft YaHei"/>
                           <a:sym typeface="Microsoft YaHei"/>
                         </a:rPr>
-                        <a:t>依据阿里巴巴 2026-08-03 发布规格：Qwen3.8-Max 总参数 2.4T、激活参数 95B；按 FP8 双实例配置。单组故障时由另一组承接，容量减半</a:t>
+                        <a:t>按 2.4T 总参数 / 95B 激活参数、FP8 精度的大模型测算；四实例配置。单组故障时由其余组承接，容量按比例下降</a:t>
                       </a:r>
                     </a:p>
                   </a:txBody>
@@ -31259,7 +30373,7 @@
                         </a:defRPr>
                       </a:pPr>
                       <a:r>
-                        <a:t>400G 级：交换机 × 2 + 网卡 48 张 + 链路</a:t>
+                        <a:t>400G 级：交换机 × 4 + 网卡 96 张 + 链路</a:t>
                       </a:r>
                     </a:p>
                     <a:p>
@@ -31275,7 +30389,7 @@
                         </a:defRPr>
                       </a:pPr>
                       <a:r>
-                        <a:t>两台交换机各带一个实例，避免交换机成为单点</a:t>
+                        <a:t>四台交换机各带一个实例，避免交换机成为单点</a:t>
                       </a:r>
                     </a:p>
                   </a:txBody>
@@ -31322,23 +30436,8 @@
                         </a:defRPr>
                       </a:pPr>
                       <a:r>
-                        <a:t>350</a:t>
-                      </a:r>
-                    </a:p>
-                    <a:p>
-                      <a:pPr algn="l">
-                        <a:defRPr sz="1000">
-                          <a:solidFill>
-                            <a:srgbClr val="1A1A1A"/>
-                          </a:solidFill>
-                          <a:latin typeface="Microsoft YaHei"/>
-                          <a:ea typeface="Microsoft YaHei"/>
-                          <a:cs typeface="Microsoft YaHei"/>
-                          <a:sym typeface="Microsoft YaHei"/>
-                        </a:defRPr>
-                      </a:pPr>
-                      <a:r>
-                        <a:t>预算按 350 万控制</a:t>
+                        <a:t>700
+预算按 700 万控制</a:t>
                       </a:r>
                     </a:p>
                   </a:txBody>
@@ -31386,7 +30485,7 @@
                           <a:cs typeface="Microsoft YaHei"/>
                           <a:sym typeface="Microsoft YaHei"/>
                         </a:rPr>
-                        <a:t>模型横跨多台，GPU 互联为必需项。两实例独立，无需 spine 和交换机互联。整机按 12 个 PCIe Gen5 槽的参考设计选型，实际使用 8 张 GPU 卡</a:t>
+                        <a:t>模型横跨多台，GPU 互联为必需项。四实例独立，无需 spine 和交换机互联。整机按 12 个 PCIe Gen5 槽的参考设计选型，实际使用 8 张 GPU 卡</a:t>
                       </a:r>
                     </a:p>
                   </a:txBody>
@@ -31436,7 +30535,7 @@
                           <a:cs typeface="Microsoft YaHei"/>
                           <a:sym typeface="Microsoft YaHei"/>
                         </a:rPr>
-                        <a:t>基础服务与入口节点 × 9</a:t>
+                        <a:t>基础服务与入口节点 × 12</a:t>
                       </a:r>
                     </a:p>
                   </a:txBody>
@@ -31484,7 +30583,7 @@
                           <a:cs typeface="Microsoft YaHei"/>
                           <a:sym typeface="Microsoft YaHei"/>
                         </a:rPr>
-                        <a:t>入口负载均衡 2 台 + 编排与应用 2 台 + 数据库与数据服务 3 台 + 中间件 2 台</a:t>
+                        <a:t>入口负载均衡 3 台 + 编排与应用 4 台 + 数据库与数据服务 3 台 + 中间件 2 台</a:t>
                       </a:r>
                     </a:p>
                   </a:txBody>
@@ -31532,7 +30631,7 @@
                           <a:cs typeface="Microsoft YaHei"/>
                           <a:sym typeface="Microsoft YaHei"/>
                         </a:rPr>
-                        <a:t>180</a:t>
+                        <a:t>240</a:t>
                       </a:r>
                     </a:p>
                   </a:txBody>
@@ -31678,7 +30777,7 @@
                           <a:cs typeface="Microsoft YaHei"/>
                           <a:sym typeface="Microsoft YaHei"/>
                         </a:rPr>
-                        <a:t>150 TB 可用，分层配置</a:t>
+                        <a:t>200 TB 可用，分层配置</a:t>
                       </a:r>
                     </a:p>
                   </a:txBody>
@@ -31726,7 +30825,7 @@
                           <a:cs typeface="Microsoft YaHei"/>
                           <a:sym typeface="Microsoft YaHei"/>
                         </a:rPr>
-                        <a:t>115</a:t>
+                        <a:t>153</a:t>
                       </a:r>
                     </a:p>
                   </a:txBody>
@@ -31920,7 +31019,7 @@
                           <a:cs typeface="Microsoft YaHei"/>
                           <a:sym typeface="Microsoft YaHei"/>
                         </a:rPr>
-                        <a:t>110</a:t>
+                        <a:t>176</a:t>
                       </a:r>
                     </a:p>
                   </a:txBody>
@@ -31968,7 +31067,7 @@
                           <a:cs typeface="Microsoft YaHei"/>
                           <a:sym typeface="Microsoft YaHei"/>
                         </a:rPr>
-                        <a:t>网络基础设施 110 万；安全设备与软件费用已列入第 17 页“安全与合规”250 万，不重复计入本页小计。与 GPU 互联 fabric 分列</a:t>
+                        <a:t>网络基础设施 176 万；安全设备与软件费用已列入第 17 页“安全与合规”250 万，不重复计入本页小计。与 GPU 互联 fabric 分列</a:t>
                       </a:r>
                     </a:p>
                   </a:txBody>
@@ -32323,7 +31422,7 @@
                           <a:cs typeface="Microsoft YaHei"/>
                           <a:sym typeface="Microsoft YaHei"/>
                         </a:rPr>
-                        <a:t>2,555</a:t>
+                        <a:t>4,869</a:t>
                       </a:r>
                     </a:p>
                   </a:txBody>
@@ -32617,7 +31716,7 @@
           <a:p>
             <a:pPr/>
             <a:r>
-              <a:t>项目投资控制价 9,407 万 · 含基本预备费</a:t>
+              <a:t>项目投资控制价 11,942 万 · 含基本预备费</a:t>
             </a:r>
           </a:p>
         </p:txBody>
@@ -33001,7 +32100,7 @@
                           <a:cs typeface="Microsoft YaHei"/>
                           <a:sym typeface="Microsoft YaHei"/>
                         </a:rPr>
-                        <a:t>2,555 万</a:t>
+                        <a:t>4,869 万</a:t>
                       </a:r>
                     </a:p>
                   </a:txBody>
@@ -33049,7 +32148,7 @@
                           <a:cs typeface="Microsoft YaHei"/>
                           <a:sym typeface="Microsoft YaHei"/>
                         </a:rPr>
-                        <a:t>27.2%</a:t>
+                        <a:t>40.8%</a:t>
                       </a:r>
                     </a:p>
                   </a:txBody>
@@ -33097,7 +32196,7 @@
                           <a:cs typeface="Microsoft YaHei"/>
                           <a:sym typeface="Microsoft YaHei"/>
                         </a:rPr>
-                        <a:t>GPU × 6、GPU 互联 fabric、9 台基础服务与入口节点、存储、机房网络、备件</a:t>
+                        <a:t>GPU × 12、GPU 互联 fabric、12 台基础服务与入口节点、存储、机房网络、备件</a:t>
                       </a:r>
                     </a:p>
                   </a:txBody>
@@ -33243,7 +32342,7 @@
                           <a:cs typeface="Microsoft YaHei"/>
                           <a:sym typeface="Microsoft YaHei"/>
                         </a:rPr>
-                        <a:t>22.3%</a:t>
+                        <a:t>17.5%</a:t>
                       </a:r>
                     </a:p>
                   </a:txBody>
@@ -33437,7 +32536,7 @@
                           <a:cs typeface="Microsoft YaHei"/>
                           <a:sym typeface="Microsoft YaHei"/>
                         </a:rPr>
-                        <a:t>13.3%</a:t>
+                        <a:t>10.5%</a:t>
                       </a:r>
                     </a:p>
                   </a:txBody>
@@ -33631,7 +32730,7 @@
                           <a:cs typeface="Microsoft YaHei"/>
                           <a:sym typeface="Microsoft YaHei"/>
                         </a:rPr>
-                        <a:t>10.4%</a:t>
+                        <a:t>8.2%</a:t>
                       </a:r>
                     </a:p>
                   </a:txBody>
@@ -33825,7 +32924,7 @@
                           <a:cs typeface="Microsoft YaHei"/>
                           <a:sym typeface="Microsoft YaHei"/>
                         </a:rPr>
-                        <a:t>9.5%</a:t>
+                        <a:t>7.5%</a:t>
                       </a:r>
                     </a:p>
                   </a:txBody>
@@ -33873,7 +32972,7 @@
                           <a:cs typeface="Microsoft YaHei"/>
                           <a:sym typeface="Microsoft YaHei"/>
                         </a:rPr>
-                        <a:t>机房托管（六台功耗上升）、外部服务、数据源、差旅、市场、审计、培训</a:t>
+                        <a:t>机房托管（十二台功耗上升）、外部服务、数据源、差旅、市场、审计、培训</a:t>
                       </a:r>
                     </a:p>
                   </a:txBody>
@@ -34019,7 +33118,7 @@
                           <a:cs typeface="Microsoft YaHei"/>
                           <a:sym typeface="Microsoft YaHei"/>
                         </a:rPr>
-                        <a:t>5.3%</a:t>
+                        <a:t>4.2%</a:t>
                       </a:r>
                     </a:p>
                   </a:txBody>
@@ -34213,7 +33312,7 @@
                           <a:cs typeface="Microsoft YaHei"/>
                           <a:sym typeface="Microsoft YaHei"/>
                         </a:rPr>
-                        <a:t>2.7%</a:t>
+                        <a:t>2.1%</a:t>
                       </a:r>
                     </a:p>
                   </a:txBody>
@@ -34359,7 +33458,7 @@
                           <a:cs typeface="Microsoft YaHei"/>
                           <a:sym typeface="Microsoft YaHei"/>
                         </a:rPr>
-                        <a:t>8,522 万</a:t>
+                        <a:t>10,836 万</a:t>
                       </a:r>
                     </a:p>
                   </a:txBody>
@@ -34553,7 +33652,7 @@
                           <a:cs typeface="Microsoft YaHei"/>
                           <a:sym typeface="Microsoft YaHei"/>
                         </a:rPr>
-                        <a:t>885 万</a:t>
+                        <a:t>1,106 万</a:t>
                       </a:r>
                     </a:p>
                   </a:txBody>
@@ -34747,7 +33846,7 @@
                           <a:cs typeface="Microsoft YaHei"/>
                           <a:sym typeface="Microsoft YaHei"/>
                         </a:rPr>
-                        <a:t>9,407 万</a:t>
+                        <a:t>11,942 万</a:t>
                       </a:r>
                     </a:p>
                   </a:txBody>
@@ -34843,7 +33942,7 @@
                           <a:cs typeface="Microsoft YaHei"/>
                           <a:sym typeface="Microsoft YaHei"/>
                         </a:rPr>
-                        <a:t>投资控制价 9,407 万。立项与资金安排按此口径</a:t>
+                        <a:t>投资控制价 11,942 万。立项与资金安排按此口径</a:t>
                       </a:r>
                     </a:p>
                   </a:txBody>
@@ -35199,7 +34298,7 @@
           <a:p>
             <a:pPr/>
             <a:r>
-              <a:t>投入 · 分阶段与稳态</a:t>
+              <a:t>投入 · 分阶段</a:t>
             </a:r>
           </a:p>
         </p:txBody>
@@ -35971,7 +35070,7 @@
                           <a:cs typeface="Microsoft YaHei"/>
                           <a:sym typeface="Microsoft YaHei"/>
                         </a:rPr>
-                        <a:t>2,555</a:t>
+                        <a:t>4,869</a:t>
                       </a:r>
                     </a:p>
                   </a:txBody>
@@ -36115,7 +35214,7 @@
                           <a:cs typeface="Microsoft YaHei"/>
                           <a:sym typeface="Microsoft YaHei"/>
                         </a:rPr>
-                        <a:t>3,639</a:t>
+                        <a:t>5,953</a:t>
                       </a:r>
                     </a:p>
                   </a:txBody>
@@ -37129,7 +36228,7 @@
                           <a:cs typeface="Microsoft YaHei"/>
                           <a:sym typeface="Microsoft YaHei"/>
                         </a:rPr>
-                        <a:t>2,555</a:t>
+                        <a:t>4,869</a:t>
                       </a:r>
                     </a:p>
                   </a:txBody>
@@ -37273,7 +36372,7 @@
                           <a:cs typeface="Microsoft YaHei"/>
                           <a:sym typeface="Microsoft YaHei"/>
                         </a:rPr>
-                        <a:t>8,522</a:t>
+                        <a:t>10,836</a:t>
                       </a:r>
                     </a:p>
                   </a:txBody>
@@ -37659,7 +36758,7 @@
                           <a:cs typeface="Microsoft YaHei"/>
                           <a:sym typeface="Microsoft YaHei"/>
                         </a:rPr>
-                        <a:t>885</a:t>
+                        <a:t>1,106</a:t>
                       </a:r>
                     </a:p>
                   </a:txBody>
@@ -38045,7 +37144,7 @@
                           <a:cs typeface="Microsoft YaHei"/>
                           <a:sym typeface="Microsoft YaHei"/>
                         </a:rPr>
-                        <a:t>9,407</a:t>
+                        <a:t>11,942</a:t>
                       </a:r>
                     </a:p>
                   </a:txBody>
@@ -38183,570 +37282,11 @@
           <a:p>
             <a:pPr/>
             <a:r>
-              <a:t>硬件与安全设备主体落在阶段一，故阶段一虽只有 6 个月，仍占静态投资约 43%。等保测评在阶段一末首测、后两阶段年度复测。预备费不分摊到阶段，动用须逐笔审批。</a:t>
+              <a:t>硬件与安全设备主体落在阶段一，故阶段一虽只有 6 个月，仍占静态投资约 55%。等保测评在阶段一末首测、后两阶段年度复测。预备费不分摊到阶段，动用须逐笔审批。</a:t>
             </a:r>
           </a:p>
         </p:txBody>
       </p:sp>
-      <p:sp>
-        <p:nvSpPr>
-          <p:cNvPr id="128" name="Text 8"/>
-          <p:cNvSpPr txBox="1"/>
-          <p:nvPr/>
-        </p:nvSpPr>
-        <p:spPr>
-          <a:xfrm>
-            <a:off x="548639" y="4393692"/>
-            <a:ext cx="11064242" cy="228601"/>
-          </a:xfrm>
-          <a:prstGeom prst="rect">
-            <a:avLst/>
-          </a:prstGeom>
-          <a:ln w="12700">
-            <a:miter lim="400000"/>
-          </a:ln>
-          <a:extLst>
-            <a:ext uri="{C572A759-6A51-4108-AA02-DFA0A04FC94B}">
-              <ma14:wrappingTextBoxFlag xmlns:ma14="http://schemas.microsoft.com/office/mac/drawingml/2011/main" val="1"/>
-            </a:ext>
-          </a:extLst>
-        </p:spPr>
-        <p:txBody>
-          <a:bodyPr lIns="0" tIns="0" rIns="0" bIns="0" anchor="ctr">
-            <a:spAutoFit/>
-          </a:bodyPr>
-          <a:lstStyle>
-            <a:lvl1pPr>
-              <a:defRPr b="1" sz="1300">
-                <a:solidFill>
-                  <a:srgbClr val="1F4220"/>
-                </a:solidFill>
-                <a:latin typeface="Microsoft YaHei"/>
-                <a:ea typeface="Microsoft YaHei"/>
-                <a:cs typeface="Microsoft YaHei"/>
-                <a:sym typeface="Microsoft YaHei"/>
-              </a:defRPr>
-            </a:lvl1pPr>
-          </a:lstStyle>
-          <a:p>
-            <a:pPr/>
-            <a:r>
-              <a:t>第四年起 · 年度稳态</a:t>
-            </a:r>
-          </a:p>
-        </p:txBody>
-      </p:sp>
-      <p:graphicFrame>
-        <p:nvGraphicFramePr>
-          <p:cNvPr id="129" name="Table 1"/>
-          <p:cNvGraphicFramePr/>
-          <p:nvPr/>
-        </p:nvGraphicFramePr>
-        <p:xfrm>
-          <a:off x="548640" y="4681728"/>
-          <a:ext cx="11064241" cy="621793"/>
-        </p:xfrm>
-        <a:graphic xmlns:a="http://schemas.openxmlformats.org/drawingml/2006/main">
-          <a:graphicData uri="http://schemas.openxmlformats.org/drawingml/2006/table">
-            <a:tbl>
-              <a:tblPr firstCol="0" firstRow="0" lastCol="0" lastRow="0" bandCol="0" bandRow="0" rtl="0">
-                <a:tableStyleId>{4C3C2611-4C71-4FC5-86AE-919BDF0F9419}</a:tableStyleId>
-              </a:tblPr>
-              <a:tblGrid>
-                <a:gridCol w="2766060"/>
-                <a:gridCol w="2212848"/>
-                <a:gridCol w="1880921"/>
-                <a:gridCol w="1659635"/>
-                <a:gridCol w="2544775"/>
-              </a:tblGrid>
-              <a:tr h="310896">
-                <a:tc>
-                  <a:txBody>
-                    <a:bodyPr/>
-                    <a:lstStyle/>
-                    <a:p>
-                      <a:pPr algn="l">
-                        <a:defRPr sz="1800"/>
-                      </a:pPr>
-                      <a:r>
-                        <a:rPr b="1" sz="1000">
-                          <a:solidFill>
-                            <a:srgbClr val="FFFFFF"/>
-                          </a:solidFill>
-                          <a:latin typeface="Microsoft YaHei"/>
-                          <a:ea typeface="Microsoft YaHei"/>
-                          <a:cs typeface="Microsoft YaHei"/>
-                          <a:sym typeface="Microsoft YaHei"/>
-                        </a:rPr>
-                        <a:t>运营人力（15 人）</a:t>
-                      </a:r>
-                    </a:p>
-                  </a:txBody>
-                  <a:tcPr marL="54864" marR="54864" marT="54864" marB="54864" anchor="ctr" anchorCtr="0" horzOverflow="overflow">
-                    <a:lnL w="6350">
-                      <a:solidFill>
-                        <a:srgbClr val="E3E3DE"/>
-                      </a:solidFill>
-                    </a:lnL>
-                    <a:lnR w="6350">
-                      <a:solidFill>
-                        <a:srgbClr val="E3E3DE"/>
-                      </a:solidFill>
-                    </a:lnR>
-                    <a:lnT w="6350">
-                      <a:solidFill>
-                        <a:srgbClr val="E3E3DE"/>
-                      </a:solidFill>
-                    </a:lnT>
-                    <a:lnB w="6350">
-                      <a:solidFill>
-                        <a:srgbClr val="E3E3DE"/>
-                      </a:solidFill>
-                    </a:lnB>
-                    <a:solidFill>
-                      <a:srgbClr val="2C5F2D"/>
-                    </a:solidFill>
-                  </a:tcPr>
-                </a:tc>
-                <a:tc>
-                  <a:txBody>
-                    <a:bodyPr/>
-                    <a:lstStyle/>
-                    <a:p>
-                      <a:pPr algn="l">
-                        <a:defRPr sz="1800"/>
-                      </a:pPr>
-                      <a:r>
-                        <a:rPr b="1" sz="1000">
-                          <a:solidFill>
-                            <a:srgbClr val="FFFFFF"/>
-                          </a:solidFill>
-                          <a:latin typeface="Microsoft YaHei"/>
-                          <a:ea typeface="Microsoft YaHei"/>
-                          <a:cs typeface="Microsoft YaHei"/>
-                          <a:sym typeface="Microsoft YaHei"/>
-                        </a:rPr>
-                        <a:t>平台年服务费</a:t>
-                      </a:r>
-                    </a:p>
-                  </a:txBody>
-                  <a:tcPr marL="54864" marR="54864" marT="54864" marB="54864" anchor="ctr" anchorCtr="0" horzOverflow="overflow">
-                    <a:lnL w="6350">
-                      <a:solidFill>
-                        <a:srgbClr val="E3E3DE"/>
-                      </a:solidFill>
-                    </a:lnL>
-                    <a:lnR w="6350">
-                      <a:solidFill>
-                        <a:srgbClr val="E3E3DE"/>
-                      </a:solidFill>
-                    </a:lnR>
-                    <a:lnT w="6350">
-                      <a:solidFill>
-                        <a:srgbClr val="E3E3DE"/>
-                      </a:solidFill>
-                    </a:lnT>
-                    <a:lnB w="6350">
-                      <a:solidFill>
-                        <a:srgbClr val="E3E3DE"/>
-                      </a:solidFill>
-                    </a:lnB>
-                    <a:solidFill>
-                      <a:srgbClr val="2C5F2D"/>
-                    </a:solidFill>
-                  </a:tcPr>
-                </a:tc>
-                <a:tc>
-                  <a:txBody>
-                    <a:bodyPr/>
-                    <a:lstStyle/>
-                    <a:p>
-                      <a:pPr algn="l">
-                        <a:defRPr sz="1800"/>
-                      </a:pPr>
-                      <a:r>
-                        <a:rPr b="1" sz="1000">
-                          <a:solidFill>
-                            <a:srgbClr val="FFFFFF"/>
-                          </a:solidFill>
-                          <a:latin typeface="Microsoft YaHei"/>
-                          <a:ea typeface="Microsoft YaHei"/>
-                          <a:cs typeface="Microsoft YaHei"/>
-                          <a:sym typeface="Microsoft YaHei"/>
-                        </a:rPr>
-                        <a:t>机房托管</a:t>
-                      </a:r>
-                    </a:p>
-                  </a:txBody>
-                  <a:tcPr marL="54864" marR="54864" marT="54864" marB="54864" anchor="ctr" anchorCtr="0" horzOverflow="overflow">
-                    <a:lnL w="6350">
-                      <a:solidFill>
-                        <a:srgbClr val="E3E3DE"/>
-                      </a:solidFill>
-                    </a:lnL>
-                    <a:lnR w="6350">
-                      <a:solidFill>
-                        <a:srgbClr val="E3E3DE"/>
-                      </a:solidFill>
-                    </a:lnR>
-                    <a:lnT w="6350">
-                      <a:solidFill>
-                        <a:srgbClr val="E3E3DE"/>
-                      </a:solidFill>
-                    </a:lnT>
-                    <a:lnB w="6350">
-                      <a:solidFill>
-                        <a:srgbClr val="E3E3DE"/>
-                      </a:solidFill>
-                    </a:lnB>
-                    <a:solidFill>
-                      <a:srgbClr val="2C5F2D"/>
-                    </a:solidFill>
-                  </a:tcPr>
-                </a:tc>
-                <a:tc>
-                  <a:txBody>
-                    <a:bodyPr/>
-                    <a:lstStyle/>
-                    <a:p>
-                      <a:pPr algn="l">
-                        <a:defRPr sz="1800"/>
-                      </a:pPr>
-                      <a:r>
-                        <a:rPr b="1" sz="1000">
-                          <a:solidFill>
-                            <a:srgbClr val="FFFFFF"/>
-                          </a:solidFill>
-                          <a:latin typeface="Microsoft YaHei"/>
-                          <a:ea typeface="Microsoft YaHei"/>
-                          <a:cs typeface="Microsoft YaHei"/>
-                          <a:sym typeface="Microsoft YaHei"/>
-                        </a:rPr>
-                        <a:t>其他</a:t>
-                      </a:r>
-                    </a:p>
-                  </a:txBody>
-                  <a:tcPr marL="54864" marR="54864" marT="54864" marB="54864" anchor="ctr" anchorCtr="0" horzOverflow="overflow">
-                    <a:lnL w="6350">
-                      <a:solidFill>
-                        <a:srgbClr val="E3E3DE"/>
-                      </a:solidFill>
-                    </a:lnL>
-                    <a:lnR w="6350">
-                      <a:solidFill>
-                        <a:srgbClr val="E3E3DE"/>
-                      </a:solidFill>
-                    </a:lnR>
-                    <a:lnT w="6350">
-                      <a:solidFill>
-                        <a:srgbClr val="E3E3DE"/>
-                      </a:solidFill>
-                    </a:lnT>
-                    <a:lnB w="6350">
-                      <a:solidFill>
-                        <a:srgbClr val="E3E3DE"/>
-                      </a:solidFill>
-                    </a:lnB>
-                    <a:solidFill>
-                      <a:srgbClr val="2C5F2D"/>
-                    </a:solidFill>
-                  </a:tcPr>
-                </a:tc>
-                <a:tc>
-                  <a:txBody>
-                    <a:bodyPr/>
-                    <a:lstStyle/>
-                    <a:p>
-                      <a:pPr algn="l">
-                        <a:defRPr sz="1800"/>
-                      </a:pPr>
-                      <a:r>
-                        <a:rPr b="1" sz="1000">
-                          <a:solidFill>
-                            <a:srgbClr val="FFFFFF"/>
-                          </a:solidFill>
-                          <a:latin typeface="Microsoft YaHei"/>
-                          <a:ea typeface="Microsoft YaHei"/>
-                          <a:cs typeface="Microsoft YaHei"/>
-                          <a:sym typeface="Microsoft YaHei"/>
-                        </a:rPr>
-                        <a:t>合计</a:t>
-                      </a:r>
-                    </a:p>
-                  </a:txBody>
-                  <a:tcPr marL="54864" marR="54864" marT="54864" marB="54864" anchor="ctr" anchorCtr="0" horzOverflow="overflow">
-                    <a:lnL w="6350">
-                      <a:solidFill>
-                        <a:srgbClr val="E3E3DE"/>
-                      </a:solidFill>
-                    </a:lnL>
-                    <a:lnR w="6350">
-                      <a:solidFill>
-                        <a:srgbClr val="E3E3DE"/>
-                      </a:solidFill>
-                    </a:lnR>
-                    <a:lnT w="6350">
-                      <a:solidFill>
-                        <a:srgbClr val="E3E3DE"/>
-                      </a:solidFill>
-                    </a:lnT>
-                    <a:lnB w="6350">
-                      <a:solidFill>
-                        <a:srgbClr val="E3E3DE"/>
-                      </a:solidFill>
-                    </a:lnB>
-                    <a:solidFill>
-                      <a:srgbClr val="2C5F2D"/>
-                    </a:solidFill>
-                  </a:tcPr>
-                </a:tc>
-              </a:tr>
-              <a:tr h="310896">
-                <a:tc>
-                  <a:txBody>
-                    <a:bodyPr/>
-                    <a:lstStyle/>
-                    <a:p>
-                      <a:pPr algn="l">
-                        <a:defRPr sz="1800"/>
-                      </a:pPr>
-                      <a:r>
-                        <a:rPr sz="1000">
-                          <a:solidFill>
-                            <a:srgbClr val="1A1A1A"/>
-                          </a:solidFill>
-                          <a:latin typeface="Microsoft YaHei"/>
-                          <a:ea typeface="Microsoft YaHei"/>
-                          <a:cs typeface="Microsoft YaHei"/>
-                          <a:sym typeface="Microsoft YaHei"/>
-                        </a:rPr>
-                        <a:t>830 万</a:t>
-                      </a:r>
-                    </a:p>
-                  </a:txBody>
-                  <a:tcPr marL="54864" marR="54864" marT="54864" marB="54864" anchor="ctr" anchorCtr="0" horzOverflow="overflow">
-                    <a:lnL w="6350">
-                      <a:solidFill>
-                        <a:srgbClr val="E3E3DE"/>
-                      </a:solidFill>
-                    </a:lnL>
-                    <a:lnR w="6350">
-                      <a:solidFill>
-                        <a:srgbClr val="E3E3DE"/>
-                      </a:solidFill>
-                    </a:lnR>
-                    <a:lnT w="6350">
-                      <a:solidFill>
-                        <a:srgbClr val="E3E3DE"/>
-                      </a:solidFill>
-                    </a:lnT>
-                    <a:lnB w="6350">
-                      <a:solidFill>
-                        <a:srgbClr val="E3E3DE"/>
-                      </a:solidFill>
-                    </a:lnB>
-                    <a:solidFill>
-                      <a:srgbClr val="FFFFFF"/>
-                    </a:solidFill>
-                  </a:tcPr>
-                </a:tc>
-                <a:tc>
-                  <a:txBody>
-                    <a:bodyPr/>
-                    <a:lstStyle/>
-                    <a:p>
-                      <a:pPr algn="l">
-                        <a:defRPr sz="1800"/>
-                      </a:pPr>
-                      <a:r>
-                        <a:rPr sz="1000">
-                          <a:solidFill>
-                            <a:srgbClr val="1A1A1A"/>
-                          </a:solidFill>
-                          <a:latin typeface="Microsoft YaHei"/>
-                          <a:ea typeface="Microsoft YaHei"/>
-                          <a:cs typeface="Microsoft YaHei"/>
-                          <a:sym typeface="Microsoft YaHei"/>
-                        </a:rPr>
-                        <a:t>250 万</a:t>
-                      </a:r>
-                    </a:p>
-                  </a:txBody>
-                  <a:tcPr marL="54864" marR="54864" marT="54864" marB="54864" anchor="ctr" anchorCtr="0" horzOverflow="overflow">
-                    <a:lnL w="6350">
-                      <a:solidFill>
-                        <a:srgbClr val="E3E3DE"/>
-                      </a:solidFill>
-                    </a:lnL>
-                    <a:lnR w="6350">
-                      <a:solidFill>
-                        <a:srgbClr val="E3E3DE"/>
-                      </a:solidFill>
-                    </a:lnR>
-                    <a:lnT w="6350">
-                      <a:solidFill>
-                        <a:srgbClr val="E3E3DE"/>
-                      </a:solidFill>
-                    </a:lnT>
-                    <a:lnB w="6350">
-                      <a:solidFill>
-                        <a:srgbClr val="E3E3DE"/>
-                      </a:solidFill>
-                    </a:lnB>
-                    <a:solidFill>
-                      <a:srgbClr val="FFFFFF"/>
-                    </a:solidFill>
-                  </a:tcPr>
-                </a:tc>
-                <a:tc>
-                  <a:txBody>
-                    <a:bodyPr/>
-                    <a:lstStyle/>
-                    <a:p>
-                      <a:pPr algn="l">
-                        <a:defRPr sz="1800"/>
-                      </a:pPr>
-                      <a:r>
-                        <a:rPr sz="1000">
-                          <a:solidFill>
-                            <a:srgbClr val="1A1A1A"/>
-                          </a:solidFill>
-                          <a:latin typeface="Microsoft YaHei"/>
-                          <a:ea typeface="Microsoft YaHei"/>
-                          <a:cs typeface="Microsoft YaHei"/>
-                          <a:sym typeface="Microsoft YaHei"/>
-                        </a:rPr>
-                        <a:t>135 万</a:t>
-                      </a:r>
-                    </a:p>
-                  </a:txBody>
-                  <a:tcPr marL="54864" marR="54864" marT="54864" marB="54864" anchor="ctr" anchorCtr="0" horzOverflow="overflow">
-                    <a:lnL w="6350">
-                      <a:solidFill>
-                        <a:srgbClr val="E3E3DE"/>
-                      </a:solidFill>
-                    </a:lnL>
-                    <a:lnR w="6350">
-                      <a:solidFill>
-                        <a:srgbClr val="E3E3DE"/>
-                      </a:solidFill>
-                    </a:lnR>
-                    <a:lnT w="6350">
-                      <a:solidFill>
-                        <a:srgbClr val="E3E3DE"/>
-                      </a:solidFill>
-                    </a:lnT>
-                    <a:lnB w="6350">
-                      <a:solidFill>
-                        <a:srgbClr val="E3E3DE"/>
-                      </a:solidFill>
-                    </a:lnB>
-                    <a:solidFill>
-                      <a:srgbClr val="FFFFFF"/>
-                    </a:solidFill>
-                  </a:tcPr>
-                </a:tc>
-                <a:tc>
-                  <a:txBody>
-                    <a:bodyPr/>
-                    <a:lstStyle/>
-                    <a:p>
-                      <a:pPr algn="l">
-                        <a:defRPr sz="1800"/>
-                      </a:pPr>
-                      <a:r>
-                        <a:rPr sz="1000">
-                          <a:solidFill>
-                            <a:srgbClr val="1A1A1A"/>
-                          </a:solidFill>
-                          <a:latin typeface="Microsoft YaHei"/>
-                          <a:ea typeface="Microsoft YaHei"/>
-                          <a:cs typeface="Microsoft YaHei"/>
-                          <a:sym typeface="Microsoft YaHei"/>
-                        </a:rPr>
-                        <a:t>145 万</a:t>
-                      </a:r>
-                    </a:p>
-                  </a:txBody>
-                  <a:tcPr marL="54864" marR="54864" marT="54864" marB="54864" anchor="ctr" anchorCtr="0" horzOverflow="overflow">
-                    <a:lnL w="6350">
-                      <a:solidFill>
-                        <a:srgbClr val="E3E3DE"/>
-                      </a:solidFill>
-                    </a:lnL>
-                    <a:lnR w="6350">
-                      <a:solidFill>
-                        <a:srgbClr val="E3E3DE"/>
-                      </a:solidFill>
-                    </a:lnR>
-                    <a:lnT w="6350">
-                      <a:solidFill>
-                        <a:srgbClr val="E3E3DE"/>
-                      </a:solidFill>
-                    </a:lnT>
-                    <a:lnB w="6350">
-                      <a:solidFill>
-                        <a:srgbClr val="E3E3DE"/>
-                      </a:solidFill>
-                    </a:lnB>
-                    <a:solidFill>
-                      <a:srgbClr val="FFFFFF"/>
-                    </a:solidFill>
-                  </a:tcPr>
-                </a:tc>
-                <a:tc>
-                  <a:txBody>
-                    <a:bodyPr/>
-                    <a:lstStyle/>
-                    <a:p>
-                      <a:pPr algn="l">
-                        <a:defRPr sz="1800"/>
-                      </a:pPr>
-                      <a:r>
-                        <a:rPr sz="1000">
-                          <a:solidFill>
-                            <a:srgbClr val="1A1A1A"/>
-                          </a:solidFill>
-                          <a:latin typeface="Microsoft YaHei"/>
-                          <a:ea typeface="Microsoft YaHei"/>
-                          <a:cs typeface="Microsoft YaHei"/>
-                          <a:sym typeface="Microsoft YaHei"/>
-                        </a:rPr>
-                        <a:t>1,360 万 / 年</a:t>
-                      </a:r>
-                    </a:p>
-                  </a:txBody>
-                  <a:tcPr marL="54864" marR="54864" marT="54864" marB="54864" anchor="ctr" anchorCtr="0" horzOverflow="overflow">
-                    <a:lnL w="6350">
-                      <a:solidFill>
-                        <a:srgbClr val="E3E3DE"/>
-                      </a:solidFill>
-                    </a:lnL>
-                    <a:lnR w="6350">
-                      <a:solidFill>
-                        <a:srgbClr val="E3E3DE"/>
-                      </a:solidFill>
-                    </a:lnR>
-                    <a:lnT w="6350">
-                      <a:solidFill>
-                        <a:srgbClr val="E3E3DE"/>
-                      </a:solidFill>
-                    </a:lnT>
-                    <a:lnB w="6350">
-                      <a:solidFill>
-                        <a:srgbClr val="E3E3DE"/>
-                      </a:solidFill>
-                    </a:lnB>
-                    <a:solidFill>
-                      <a:srgbClr val="FFFFFF"/>
-                    </a:solidFill>
-                  </a:tcPr>
-                </a:tc>
-              </a:tr>
-            </a:tbl>
-          </a:graphicData>
-        </a:graphic>
-      </p:graphicFrame>
       <p:sp>
         <p:nvSpPr>
           <p:cNvPr id="130" name="Shape 9"/>
@@ -38804,54 +37344,6 @@
           <a:lstStyle/>
           <a:p>
             <a:pPr/>
-          </a:p>
-        </p:txBody>
-      </p:sp>
-      <p:sp>
-        <p:nvSpPr>
-          <p:cNvPr id="132" name="Text 11"/>
-          <p:cNvSpPr txBox="1"/>
-          <p:nvPr/>
-        </p:nvSpPr>
-        <p:spPr>
-          <a:xfrm>
-            <a:off x="749808" y="5427471"/>
-            <a:ext cx="10652760" cy="355601"/>
-          </a:xfrm>
-          <a:prstGeom prst="rect">
-            <a:avLst/>
-          </a:prstGeom>
-          <a:ln w="12700">
-            <a:miter lim="400000"/>
-          </a:ln>
-          <a:extLst>
-            <a:ext uri="{C572A759-6A51-4108-AA02-DFA0A04FC94B}">
-              <ma14:wrappingTextBoxFlag xmlns:ma14="http://schemas.microsoft.com/office/mac/drawingml/2011/main" val="1"/>
-            </a:ext>
-          </a:extLst>
-        </p:spPr>
-        <p:txBody>
-          <a:bodyPr lIns="0" tIns="0" rIns="0" bIns="0" anchor="ctr">
-            <a:spAutoFit/>
-          </a:bodyPr>
-          <a:lstStyle>
-            <a:lvl1pPr>
-              <a:defRPr sz="1000">
-                <a:solidFill>
-                  <a:srgbClr val="1A1A1A"/>
-                </a:solidFill>
-                <a:latin typeface="Microsoft YaHei"/>
-                <a:ea typeface="Microsoft YaHei"/>
-                <a:cs typeface="Microsoft YaHei"/>
-                <a:sym typeface="Microsoft YaHei"/>
-              </a:defRPr>
-            </a:lvl1pPr>
-          </a:lstStyle>
-          <a:p>
-            <a:pPr/>
-            <a:r>
-              <a:t>两个中心为常设组织，按控制价计，静态投资中约 25% 是人员成本，性质上是运营支出而非一次性建设投资。平台与应用的划分：换个客户还用得上的通用能力属基座，需要稻生业务知识才能实现的属应用层。</a:t>
-            </a:r>
           </a:p>
         </p:txBody>
       </p:sp>
@@ -38917,34 +37409,117 @@
       </p:sp>
       <p:sp>
         <p:nvSpPr>
-          <p:cNvPr id="135" name="Text 14"/>
+          <p:cNvPr id="135" name="Rectangle 134"/>
+          <p:cNvSpPr/>
+          <p:nvPr/>
+        </p:nvSpPr>
+        <p:spPr>
+          <a:xfrm>
+            <a:off x="548640" y="4892040"/>
+            <a:ext cx="11064240" cy="731520"/>
+          </a:xfrm>
+          <a:prstGeom prst="rect">
+            <a:avLst/>
+          </a:prstGeom>
+          <a:solidFill>
+            <a:srgbClr val="F0EDE4"/>
+          </a:solidFill>
+          <a:ln>
+            <a:noFill/>
+          </a:ln>
+          <a:effectLst/>
+        </p:spPr>
+        <p:style>
+          <a:lnRef idx="1">
+            <a:schemeClr val="accent1"/>
+          </a:lnRef>
+          <a:fillRef idx="3">
+            <a:schemeClr val="accent1"/>
+          </a:fillRef>
+          <a:effectRef idx="2">
+            <a:schemeClr val="accent1"/>
+          </a:effectRef>
+          <a:fontRef idx="minor">
+            <a:schemeClr val="lt1"/>
+          </a:fontRef>
+        </p:style>
+        <p:txBody>
+          <a:bodyPr rtlCol="0" anchor="ctr"/>
+          <a:lstStyle/>
+          <a:p/>
+        </p:txBody>
+      </p:sp>
+      <p:sp>
+        <p:nvSpPr>
+          <p:cNvPr id="136" name="Rectangle 135"/>
+          <p:cNvSpPr/>
+          <p:nvPr/>
+        </p:nvSpPr>
+        <p:spPr>
+          <a:xfrm>
+            <a:off x="548640" y="4892040"/>
+            <a:ext cx="54864" cy="731520"/>
+          </a:xfrm>
+          <a:prstGeom prst="rect">
+            <a:avLst/>
+          </a:prstGeom>
+          <a:solidFill>
+            <a:srgbClr val="5B6C8F"/>
+          </a:solidFill>
+          <a:ln>
+            <a:noFill/>
+          </a:ln>
+          <a:effectLst/>
+        </p:spPr>
+        <p:style>
+          <a:lnRef idx="1">
+            <a:schemeClr val="accent1"/>
+          </a:lnRef>
+          <a:fillRef idx="3">
+            <a:schemeClr val="accent1"/>
+          </a:fillRef>
+          <a:effectRef idx="2">
+            <a:schemeClr val="accent1"/>
+          </a:effectRef>
+          <a:fontRef idx="minor">
+            <a:schemeClr val="lt1"/>
+          </a:fontRef>
+        </p:style>
+        <p:txBody>
+          <a:bodyPr rtlCol="0" anchor="ctr"/>
+          <a:lstStyle/>
+          <a:p/>
+        </p:txBody>
+      </p:sp>
+      <p:sp>
+        <p:nvSpPr>
+          <p:cNvPr id="137" name="TextBox 136"/>
           <p:cNvSpPr txBox="1"/>
           <p:nvPr/>
         </p:nvSpPr>
         <p:spPr>
           <a:xfrm>
-            <a:off x="749808" y="6037579"/>
-            <a:ext cx="10652760" cy="177801"/>
+            <a:off x="749808" y="4983479"/>
+            <a:ext cx="10661904" cy="548640"/>
           </a:xfrm>
           <a:prstGeom prst="rect">
             <a:avLst/>
           </a:prstGeom>
-          <a:ln w="12700">
-            <a:miter lim="400000"/>
-          </a:ln>
-          <a:extLst>
-            <a:ext uri="{C572A759-6A51-4108-AA02-DFA0A04FC94B}">
-              <ma14:wrappingTextBoxFlag xmlns:ma14="http://schemas.microsoft.com/office/mac/drawingml/2011/main" val="1"/>
-            </a:ext>
-          </a:extLst>
+          <a:noFill/>
         </p:spPr>
         <p:txBody>
-          <a:bodyPr lIns="0" tIns="0" rIns="0" bIns="0" anchor="ctr">
+          <a:bodyPr wrap="square" lIns="0" rIns="0" tIns="0" bIns="0" anchor="ctr">
             <a:spAutoFit/>
           </a:bodyPr>
-          <a:lstStyle>
-            <a:lvl1pPr>
-              <a:defRPr sz="1000">
+          <a:lstStyle/>
+          <a:p>
+            <a:pPr algn="l">
+              <a:lnSpc>
+                <a:spcPct val="125000"/>
+              </a:lnSpc>
+            </a:pPr>
+            <a:r>
+              <a:rPr sz="900" b="0">
                 <a:solidFill>
                   <a:srgbClr val="1A1A1A"/>
                 </a:solidFill>
@@ -38952,13 +37527,172 @@
                 <a:ea typeface="Microsoft YaHei"/>
                 <a:cs typeface="Microsoft YaHei"/>
                 <a:sym typeface="Microsoft YaHei"/>
-              </a:defRPr>
-            </a:lvl1pPr>
-          </a:lstStyle>
+              </a:rPr>
+              <a:t>本表只到建设期末。两个中心是常设组织, 建成后仍有人力与托管等年度支出, 那部分走常规运营预算, 不计入本项目的投资控制价。</a:t>
+            </a:r>
+          </a:p>
           <a:p>
-            <a:pPr/>
+            <a:pPr algn="l">
+              <a:lnSpc>
+                <a:spcPct val="125000"/>
+              </a:lnSpc>
+            </a:pPr>
             <a:r>
-              <a:t>稳态预算之外另行管理三项：应用迭代按 350 万/年控制；六台 GPU 三年后换代另行立项；检测仪表校准与耗材按年度实际需求纳入运营预算。</a:t>
+              <a:rPr sz="900" b="0">
+                <a:solidFill>
+                  <a:srgbClr val="1A1A1A"/>
+                </a:solidFill>
+                <a:latin typeface="Microsoft YaHei"/>
+                <a:ea typeface="Microsoft YaHei"/>
+                <a:cs typeface="Microsoft YaHei"/>
+                <a:sym typeface="Microsoft YaHei"/>
+              </a:rPr>
+              <a:t>另行管理: 应用迭代按 350 万/年控制; GPU 换代另行立项; 检测仪表校准与耗材按年度实际需求。</a:t>
+            </a:r>
+          </a:p>
+        </p:txBody>
+      </p:sp>
+      <p:sp>
+        <p:nvSpPr>
+          <p:cNvPr id="138" name="Rectangle 137"/>
+          <p:cNvSpPr/>
+          <p:nvPr/>
+        </p:nvSpPr>
+        <p:spPr>
+          <a:xfrm>
+            <a:off x="548640" y="4892040"/>
+            <a:ext cx="11064240" cy="731520"/>
+          </a:xfrm>
+          <a:prstGeom prst="rect">
+            <a:avLst/>
+          </a:prstGeom>
+          <a:solidFill>
+            <a:srgbClr val="F0EDE4"/>
+          </a:solidFill>
+          <a:ln>
+            <a:noFill/>
+          </a:ln>
+          <a:effectLst/>
+        </p:spPr>
+        <p:style>
+          <a:lnRef idx="1">
+            <a:schemeClr val="accent1"/>
+          </a:lnRef>
+          <a:fillRef idx="3">
+            <a:schemeClr val="accent1"/>
+          </a:fillRef>
+          <a:effectRef idx="2">
+            <a:schemeClr val="accent1"/>
+          </a:effectRef>
+          <a:fontRef idx="minor">
+            <a:schemeClr val="lt1"/>
+          </a:fontRef>
+        </p:style>
+        <p:txBody>
+          <a:bodyPr rtlCol="0" anchor="ctr"/>
+          <a:lstStyle/>
+          <a:p/>
+        </p:txBody>
+      </p:sp>
+      <p:sp>
+        <p:nvSpPr>
+          <p:cNvPr id="139" name="Rectangle 138"/>
+          <p:cNvSpPr/>
+          <p:nvPr/>
+        </p:nvSpPr>
+        <p:spPr>
+          <a:xfrm>
+            <a:off x="548640" y="4892040"/>
+            <a:ext cx="54864" cy="731520"/>
+          </a:xfrm>
+          <a:prstGeom prst="rect">
+            <a:avLst/>
+          </a:prstGeom>
+          <a:solidFill>
+            <a:srgbClr val="5B6C8F"/>
+          </a:solidFill>
+          <a:ln>
+            <a:noFill/>
+          </a:ln>
+          <a:effectLst/>
+        </p:spPr>
+        <p:style>
+          <a:lnRef idx="1">
+            <a:schemeClr val="accent1"/>
+          </a:lnRef>
+          <a:fillRef idx="3">
+            <a:schemeClr val="accent1"/>
+          </a:fillRef>
+          <a:effectRef idx="2">
+            <a:schemeClr val="accent1"/>
+          </a:effectRef>
+          <a:fontRef idx="minor">
+            <a:schemeClr val="lt1"/>
+          </a:fontRef>
+        </p:style>
+        <p:txBody>
+          <a:bodyPr rtlCol="0" anchor="ctr"/>
+          <a:lstStyle/>
+          <a:p/>
+        </p:txBody>
+      </p:sp>
+      <p:sp>
+        <p:nvSpPr>
+          <p:cNvPr id="140" name="TextBox 139"/>
+          <p:cNvSpPr txBox="1"/>
+          <p:nvPr/>
+        </p:nvSpPr>
+        <p:spPr>
+          <a:xfrm>
+            <a:off x="749808" y="4983479"/>
+            <a:ext cx="10661904" cy="548640"/>
+          </a:xfrm>
+          <a:prstGeom prst="rect">
+            <a:avLst/>
+          </a:prstGeom>
+          <a:noFill/>
+        </p:spPr>
+        <p:txBody>
+          <a:bodyPr wrap="square" lIns="0" rIns="0" tIns="0" bIns="0" anchor="ctr">
+            <a:spAutoFit/>
+          </a:bodyPr>
+          <a:lstStyle/>
+          <a:p>
+            <a:pPr algn="l">
+              <a:lnSpc>
+                <a:spcPct val="125000"/>
+              </a:lnSpc>
+            </a:pPr>
+            <a:r>
+              <a:rPr sz="900" b="0">
+                <a:solidFill>
+                  <a:srgbClr val="1A1A1A"/>
+                </a:solidFill>
+                <a:latin typeface="Microsoft YaHei"/>
+                <a:ea typeface="Microsoft YaHei"/>
+                <a:cs typeface="Microsoft YaHei"/>
+                <a:sym typeface="Microsoft YaHei"/>
+              </a:rPr>
+              <a:t>本表只到建设期末。两个中心是常设组织, 建成后仍有人力与托管等年度支出, 那部分走常规运营预算, 不计入本项目的投资控制价。</a:t>
+            </a:r>
+          </a:p>
+          <a:p>
+            <a:pPr algn="l">
+              <a:lnSpc>
+                <a:spcPct val="125000"/>
+              </a:lnSpc>
+            </a:pPr>
+            <a:r>
+              <a:rPr sz="900" b="0">
+                <a:solidFill>
+                  <a:srgbClr val="1A1A1A"/>
+                </a:solidFill>
+                <a:latin typeface="Microsoft YaHei"/>
+                <a:ea typeface="Microsoft YaHei"/>
+                <a:cs typeface="Microsoft YaHei"/>
+                <a:sym typeface="Microsoft YaHei"/>
+              </a:rPr>
+              <a:t>另行管理: 应用迭代按 350 万/年控制; GPU 换代另行立项; 检测仪表校准与耗材按年度实际需求。</a:t>
             </a:r>
           </a:p>
         </p:txBody>
@@ -39451,7 +38185,7 @@
                           <a:cs typeface="Microsoft YaHei"/>
                           <a:sym typeface="Microsoft YaHei"/>
                         </a:rPr>
-                        <a:t>2,555 万</a:t>
+                        <a:t>4,869 万</a:t>
                       </a:r>
                     </a:p>
                   </a:txBody>
@@ -40367,7 +39101,7 @@
           <a:p>
             <a:pPr/>
             <a:r>
-              <a:t>可申报科目按控制价合计 5,037 万，占静态投资约 59%。硬件是最易申报的科目；预备费按实际动用时所属科目归类，此处不预先计入。</a:t>
+              <a:t>可申报科目按控制价合计 7,351 万，占静态投资约 68%。硬件是最易申报的科目；预备费按实际动用时所属科目归类，此处不预先计入。</a:t>
             </a:r>
           </a:p>
         </p:txBody>
